--- a/hcltech_gtm_three_plays.pptx
+++ b/hcltech_gtm_three_plays.pptx
@@ -2184,7 +2184,7 @@
         <p:spPr>
           <a:xfrm>
             <a:off x="594360" y="457200"/>
-            <a:ext cx="11000232" cy="530352"/>
+            <a:ext cx="11000232" cy="502920"/>
           </a:xfrm>
           <a:prstGeom prst="rect">
             <a:avLst/>
@@ -2231,7 +2231,7 @@
         </p:nvSpPr>
         <p:spPr>
           <a:xfrm>
-            <a:off x="594360" y="1042415"/>
+            <a:off x="594360" y="1024128"/>
             <a:ext cx="11000232" cy="292608"/>
           </a:xfrm>
           <a:prstGeom prst="rect">
@@ -2257,7 +2257,7 @@
                 </a:solidFill>
                 <a:latin typeface="Aptos"/>
               </a:rPr>
-              <a:t>Vertical sales embedded, DBS and DPO on one story, partners co-creating — early proof already in.</a:t>
+              <a:t>Industry-led, AI-powered, ecosystem-enabled GTM to accelerate platform adoption.</a:t>
             </a:r>
           </a:p>
         </p:txBody>
@@ -2270,12 +2270,12 @@
         </p:nvSpPr>
         <p:spPr>
           <a:xfrm>
-            <a:off x="594360" y="1426464"/>
-            <a:ext cx="3520440" cy="4663440"/>
+            <a:off x="594360" y="1481328"/>
+            <a:ext cx="3456432" cy="2962656"/>
           </a:xfrm>
           <a:prstGeom prst="roundRect">
             <a:avLst>
-              <a:gd name="adj" fmla="val 2500"/>
+              <a:gd name="adj" fmla="val 3000"/>
             </a:avLst>
           </a:prstGeom>
           <a:solidFill>
@@ -2318,12 +2318,12 @@
         </p:nvSpPr>
         <p:spPr>
           <a:xfrm>
-            <a:off x="832104" y="1645920"/>
-            <a:ext cx="530352" cy="365760"/>
+            <a:off x="832104" y="1700784"/>
+            <a:ext cx="475488" cy="402336"/>
           </a:xfrm>
           <a:prstGeom prst="roundRect">
             <a:avLst>
-              <a:gd name="adj" fmla="val 18000"/>
+              <a:gd name="adj" fmla="val 20000"/>
             </a:avLst>
           </a:prstGeom>
           <a:solidFill>
@@ -2349,12 +2349,12 @@
           </a:fontRef>
         </p:style>
         <p:txBody>
-          <a:bodyPr rtlCol="0" anchor="ctr" wrap="square" lIns="45720" rIns="45720" tIns="0" bIns="0"/>
+          <a:bodyPr rtlCol="0" anchor="ctr" wrap="square" lIns="73152" rIns="73152" tIns="0" bIns="0"/>
           <a:lstStyle/>
           <a:p>
             <a:pPr algn="ctr">
               <a:lnSpc>
-                <a:spcPct val="95000"/>
+                <a:spcPct val="98000"/>
               </a:lnSpc>
               <a:spcAft>
                 <a:spcPts val="0"/>
@@ -2380,8 +2380,8 @@
         </p:nvSpPr>
         <p:spPr>
           <a:xfrm>
-            <a:off x="1472184" y="1591056"/>
-            <a:ext cx="2404872" cy="475488"/>
+            <a:off x="1435608" y="1682496"/>
+            <a:ext cx="2377439" cy="219456"/>
           </a:xfrm>
           <a:prstGeom prst="rect">
             <a:avLst/>
@@ -2395,54 +2395,247 @@
           <a:lstStyle/>
           <a:p>
             <a:pPr algn="l">
-              <a:lnSpc>
-                <a:spcPct val="95000"/>
-              </a:lnSpc>
               <a:spcAft>
                 <a:spcPts val="0"/>
               </a:spcAft>
             </a:pPr>
             <a:r>
-              <a:rPr sz="1500" b="1">
+              <a:rPr sz="1250" b="1">
                 <a:solidFill>
                   <a:srgbClr val="411482"/>
                 </a:solidFill>
                 <a:latin typeface="Aptos"/>
               </a:rPr>
-              <a:t>Embedded with</a:t>
+              <a:t>VERTICAL SALES</a:t>
             </a:r>
           </a:p>
+        </p:txBody>
+      </p:sp>
+      <p:sp>
+        <p:nvSpPr>
+          <p:cNvPr id="7" name="TextBox 6"/>
+          <p:cNvSpPr txBox="1"/>
+          <p:nvPr/>
+        </p:nvSpPr>
+        <p:spPr>
+          <a:xfrm>
+            <a:off x="1435608" y="1938528"/>
+            <a:ext cx="2377439" cy="219456"/>
+          </a:xfrm>
+          <a:prstGeom prst="rect">
+            <a:avLst/>
+          </a:prstGeom>
+          <a:noFill/>
+        </p:spPr>
+        <p:txBody>
+          <a:bodyPr wrap="square" lIns="0" rIns="0" tIns="0" bIns="0" anchor="t">
+            <a:spAutoFit/>
+          </a:bodyPr>
+          <a:lstStyle/>
           <a:p>
             <a:pPr algn="l">
-              <a:lnSpc>
-                <a:spcPct val="95000"/>
-              </a:lnSpc>
               <a:spcAft>
                 <a:spcPts val="0"/>
               </a:spcAft>
             </a:pPr>
             <a:r>
-              <a:rPr sz="1500" b="1">
+              <a:rPr sz="1200" b="0">
                 <a:solidFill>
-                  <a:srgbClr val="411482"/>
+                  <a:srgbClr val="000000"/>
                 </a:solidFill>
                 <a:latin typeface="Aptos"/>
               </a:rPr>
-              <a:t>Vertical Sales</a:t>
+              <a:t>Drive demand</a:t>
             </a:r>
           </a:p>
         </p:txBody>
       </p:sp>
       <p:sp>
         <p:nvSpPr>
-          <p:cNvPr id="7" name="TextBox 6"/>
+          <p:cNvPr id="8" name="Oval 7"/>
+          <p:cNvSpPr/>
+          <p:nvPr/>
+        </p:nvSpPr>
+        <p:spPr>
+          <a:xfrm>
+            <a:off x="1161288" y="2432304"/>
+            <a:ext cx="402336" cy="402336"/>
+          </a:xfrm>
+          <a:prstGeom prst="ellipse">
+            <a:avLst/>
+          </a:prstGeom>
+          <a:solidFill>
+            <a:srgbClr val="E6EBF5"/>
+          </a:solidFill>
+          <a:ln>
+            <a:noFill/>
+          </a:ln>
+          <a:effectLst/>
+        </p:spPr>
+        <p:style>
+          <a:lnRef idx="1">
+            <a:schemeClr val="accent1"/>
+          </a:lnRef>
+          <a:fillRef idx="3">
+            <a:schemeClr val="accent1"/>
+          </a:fillRef>
+          <a:effectRef idx="2">
+            <a:schemeClr val="accent1"/>
+          </a:effectRef>
+          <a:fontRef idx="minor">
+            <a:schemeClr val="lt1"/>
+          </a:fontRef>
+        </p:style>
+        <p:txBody>
+          <a:bodyPr rtlCol="0" anchor="ctr" wrap="square"/>
+          <a:lstStyle/>
+          <a:p>
+            <a:pPr algn="ctr"/>
+          </a:p>
+        </p:txBody>
+      </p:sp>
+      <p:sp>
+        <p:nvSpPr>
+          <p:cNvPr id="9" name="Oval 8"/>
+          <p:cNvSpPr/>
+          <p:nvPr/>
+        </p:nvSpPr>
+        <p:spPr>
+          <a:xfrm>
+            <a:off x="1252728" y="2523744"/>
+            <a:ext cx="219456" cy="219456"/>
+          </a:xfrm>
+          <a:prstGeom prst="ellipse">
+            <a:avLst/>
+          </a:prstGeom>
+          <a:noFill/>
+          <a:ln w="12700">
+            <a:solidFill>
+              <a:srgbClr val="411482"/>
+            </a:solidFill>
+          </a:ln>
+          <a:effectLst/>
+        </p:spPr>
+        <p:style>
+          <a:lnRef idx="1">
+            <a:schemeClr val="accent1"/>
+          </a:lnRef>
+          <a:fillRef idx="3">
+            <a:schemeClr val="accent1"/>
+          </a:fillRef>
+          <a:effectRef idx="2">
+            <a:schemeClr val="accent1"/>
+          </a:effectRef>
+          <a:fontRef idx="minor">
+            <a:schemeClr val="lt1"/>
+          </a:fontRef>
+        </p:style>
+        <p:txBody>
+          <a:bodyPr rtlCol="0" anchor="ctr" wrap="square"/>
+          <a:lstStyle/>
+          <a:p>
+            <a:pPr algn="ctr"/>
+          </a:p>
+        </p:txBody>
+      </p:sp>
+      <p:sp>
+        <p:nvSpPr>
+          <p:cNvPr id="10" name="Oval 9"/>
+          <p:cNvSpPr/>
+          <p:nvPr/>
+        </p:nvSpPr>
+        <p:spPr>
+          <a:xfrm>
+            <a:off x="1302105" y="2573121"/>
+            <a:ext cx="120700" cy="120700"/>
+          </a:xfrm>
+          <a:prstGeom prst="ellipse">
+            <a:avLst/>
+          </a:prstGeom>
+          <a:noFill/>
+          <a:ln w="12700">
+            <a:solidFill>
+              <a:srgbClr val="411482"/>
+            </a:solidFill>
+          </a:ln>
+          <a:effectLst/>
+        </p:spPr>
+        <p:style>
+          <a:lnRef idx="1">
+            <a:schemeClr val="accent1"/>
+          </a:lnRef>
+          <a:fillRef idx="3">
+            <a:schemeClr val="accent1"/>
+          </a:fillRef>
+          <a:effectRef idx="2">
+            <a:schemeClr val="accent1"/>
+          </a:effectRef>
+          <a:fontRef idx="minor">
+            <a:schemeClr val="lt1"/>
+          </a:fontRef>
+        </p:style>
+        <p:txBody>
+          <a:bodyPr rtlCol="0" anchor="ctr" wrap="square"/>
+          <a:lstStyle/>
+          <a:p>
+            <a:pPr algn="ctr"/>
+          </a:p>
+        </p:txBody>
+      </p:sp>
+      <p:sp>
+        <p:nvSpPr>
+          <p:cNvPr id="11" name="Oval 10"/>
+          <p:cNvSpPr/>
+          <p:nvPr/>
+        </p:nvSpPr>
+        <p:spPr>
+          <a:xfrm>
+            <a:off x="1342704" y="2613720"/>
+            <a:ext cx="39502" cy="39502"/>
+          </a:xfrm>
+          <a:prstGeom prst="ellipse">
+            <a:avLst/>
+          </a:prstGeom>
+          <a:solidFill>
+            <a:srgbClr val="411482"/>
+          </a:solidFill>
+          <a:ln>
+            <a:noFill/>
+          </a:ln>
+          <a:effectLst/>
+        </p:spPr>
+        <p:style>
+          <a:lnRef idx="1">
+            <a:schemeClr val="accent1"/>
+          </a:lnRef>
+          <a:fillRef idx="3">
+            <a:schemeClr val="accent1"/>
+          </a:fillRef>
+          <a:effectRef idx="2">
+            <a:schemeClr val="accent1"/>
+          </a:effectRef>
+          <a:fontRef idx="minor">
+            <a:schemeClr val="lt1"/>
+          </a:fontRef>
+        </p:style>
+        <p:txBody>
+          <a:bodyPr rtlCol="0" anchor="ctr" wrap="square"/>
+          <a:lstStyle/>
+          <a:p>
+            <a:pPr algn="ctr"/>
+          </a:p>
+        </p:txBody>
+      </p:sp>
+      <p:sp>
+        <p:nvSpPr>
+          <p:cNvPr id="12" name="TextBox 11"/>
           <p:cNvSpPr txBox="1"/>
           <p:nvPr/>
         </p:nvSpPr>
         <p:spPr>
           <a:xfrm>
-            <a:off x="832104" y="2157984"/>
-            <a:ext cx="3044952" cy="384048"/>
+            <a:off x="1709928" y="2395728"/>
+            <a:ext cx="2103120" cy="475488"/>
           </a:xfrm>
           <a:prstGeom prst="rect">
             <a:avLst/>
@@ -2450,7 +2643,7 @@
           <a:noFill/>
         </p:spPr>
         <p:txBody>
-          <a:bodyPr wrap="square" lIns="0" rIns="0" tIns="0" bIns="0" anchor="t">
+          <a:bodyPr wrap="square" lIns="0" rIns="0" tIns="0" bIns="0" anchor="ctr">
             <a:spAutoFit/>
           </a:bodyPr>
           <a:lstStyle/>
@@ -2464,37 +2657,36 @@
               </a:spcAft>
             </a:pPr>
             <a:r>
-              <a:rPr sz="1050" b="0">
+              <a:rPr sz="1000" b="0">
                 <a:solidFill>
-                  <a:srgbClr val="8291A0"/>
+                  <a:srgbClr val="000000"/>
                 </a:solidFill>
                 <a:latin typeface="Aptos"/>
               </a:rPr>
-              <a:t>Deepen vertical alignment and activate BPO platform conversations at scale.</a:t>
+              <a:t>Deepen vertical alignment</a:t>
             </a:r>
           </a:p>
         </p:txBody>
       </p:sp>
       <p:sp>
         <p:nvSpPr>
-          <p:cNvPr id="8" name="Oval 7"/>
+          <p:cNvPr id="13" name="Oval 12"/>
           <p:cNvSpPr/>
           <p:nvPr/>
         </p:nvSpPr>
         <p:spPr>
           <a:xfrm>
-            <a:off x="1257300" y="2679191"/>
-            <a:ext cx="2194560" cy="1060704"/>
+            <a:off x="1161288" y="3072384"/>
+            <a:ext cx="402336" cy="402336"/>
           </a:xfrm>
           <a:prstGeom prst="ellipse">
             <a:avLst/>
           </a:prstGeom>
-          <a:noFill/>
-          <a:ln w="9525">
-            <a:solidFill>
-              <a:srgbClr val="C8D2DD"/>
-            </a:solidFill>
-            <a:prstDash val="dash"/>
+          <a:solidFill>
+            <a:srgbClr val="E6EBF5"/>
+          </a:solidFill>
+          <a:ln>
+            <a:noFill/>
           </a:ln>
           <a:effectLst/>
         </p:spPr>
@@ -2522,286 +2714,14 @@
       </p:sp>
       <p:sp>
         <p:nvSpPr>
-          <p:cNvPr id="9" name="Oval 8"/>
-          <p:cNvSpPr/>
-          <p:nvPr/>
-        </p:nvSpPr>
-        <p:spPr>
-          <a:xfrm>
-            <a:off x="1952244" y="2807208"/>
-            <a:ext cx="804672" cy="804672"/>
-          </a:xfrm>
-          <a:prstGeom prst="ellipse">
-            <a:avLst/>
-          </a:prstGeom>
-          <a:solidFill>
-            <a:srgbClr val="411482"/>
-          </a:solidFill>
-          <a:ln>
-            <a:noFill/>
-          </a:ln>
-          <a:effectLst/>
-        </p:spPr>
-        <p:style>
-          <a:lnRef idx="1">
-            <a:schemeClr val="accent1"/>
-          </a:lnRef>
-          <a:fillRef idx="3">
-            <a:schemeClr val="accent1"/>
-          </a:fillRef>
-          <a:effectRef idx="2">
-            <a:schemeClr val="accent1"/>
-          </a:effectRef>
-          <a:fontRef idx="minor">
-            <a:schemeClr val="lt1"/>
-          </a:fontRef>
-        </p:style>
-        <p:txBody>
-          <a:bodyPr rtlCol="0" anchor="ctr" wrap="square"/>
-          <a:lstStyle/>
-          <a:p>
-            <a:pPr algn="ctr"/>
-          </a:p>
-        </p:txBody>
-      </p:sp>
-      <p:sp>
-        <p:nvSpPr>
-          <p:cNvPr id="10" name="Oval 9"/>
-          <p:cNvSpPr/>
-          <p:nvPr/>
-        </p:nvSpPr>
-        <p:spPr>
-          <a:xfrm>
-            <a:off x="2274112" y="3074212"/>
-            <a:ext cx="109728" cy="109728"/>
-          </a:xfrm>
-          <a:prstGeom prst="ellipse">
-            <a:avLst/>
-          </a:prstGeom>
-          <a:noFill/>
-          <a:ln w="12700">
-            <a:solidFill>
-              <a:srgbClr val="FFFFFF"/>
-            </a:solidFill>
-          </a:ln>
-          <a:effectLst/>
-        </p:spPr>
-        <p:style>
-          <a:lnRef idx="1">
-            <a:schemeClr val="accent1"/>
-          </a:lnRef>
-          <a:fillRef idx="3">
-            <a:schemeClr val="accent1"/>
-          </a:fillRef>
-          <a:effectRef idx="2">
-            <a:schemeClr val="accent1"/>
-          </a:effectRef>
-          <a:fontRef idx="minor">
-            <a:schemeClr val="lt1"/>
-          </a:fontRef>
-        </p:style>
-        <p:txBody>
-          <a:bodyPr rtlCol="0" anchor="ctr" wrap="square"/>
-          <a:lstStyle/>
-          <a:p>
-            <a:pPr algn="ctr"/>
-          </a:p>
-        </p:txBody>
-      </p:sp>
-      <p:sp>
-        <p:nvSpPr>
-          <p:cNvPr id="11" name="Round Same Side Corner Rectangle 10"/>
-          <p:cNvSpPr/>
-          <p:nvPr/>
-        </p:nvSpPr>
-        <p:spPr>
-          <a:xfrm>
-            <a:off x="2255824" y="3187598"/>
-            <a:ext cx="146304" cy="160934"/>
-          </a:xfrm>
-          <a:prstGeom prst="round2SameRect">
-            <a:avLst>
-              <a:gd name="adj1" fmla="val 45000"/>
-              <a:gd name="adj2" fmla="val 0"/>
-            </a:avLst>
-          </a:prstGeom>
-          <a:noFill/>
-          <a:ln w="12700">
-            <a:solidFill>
-              <a:srgbClr val="FFFFFF"/>
-            </a:solidFill>
-          </a:ln>
-          <a:effectLst/>
-        </p:spPr>
-        <p:style>
-          <a:lnRef idx="1">
-            <a:schemeClr val="accent1"/>
-          </a:lnRef>
-          <a:fillRef idx="3">
-            <a:schemeClr val="accent1"/>
-          </a:fillRef>
-          <a:effectRef idx="2">
-            <a:schemeClr val="accent1"/>
-          </a:effectRef>
-          <a:fontRef idx="minor">
-            <a:schemeClr val="lt1"/>
-          </a:fontRef>
-        </p:style>
-        <p:txBody>
-          <a:bodyPr rtlCol="0" anchor="ctr" wrap="square"/>
-          <a:lstStyle/>
-          <a:p>
-            <a:pPr algn="ctr"/>
-          </a:p>
-        </p:txBody>
-      </p:sp>
-      <p:sp>
-        <p:nvSpPr>
-          <p:cNvPr id="12" name="Oval 11"/>
-          <p:cNvSpPr/>
-          <p:nvPr/>
-        </p:nvSpPr>
-        <p:spPr>
-          <a:xfrm>
-            <a:off x="2372868" y="3074212"/>
-            <a:ext cx="109728" cy="109728"/>
-          </a:xfrm>
-          <a:prstGeom prst="ellipse">
-            <a:avLst/>
-          </a:prstGeom>
-          <a:noFill/>
-          <a:ln w="12700">
-            <a:solidFill>
-              <a:srgbClr val="FFFFFF"/>
-            </a:solidFill>
-          </a:ln>
-          <a:effectLst/>
-        </p:spPr>
-        <p:style>
-          <a:lnRef idx="1">
-            <a:schemeClr val="accent1"/>
-          </a:lnRef>
-          <a:fillRef idx="3">
-            <a:schemeClr val="accent1"/>
-          </a:fillRef>
-          <a:effectRef idx="2">
-            <a:schemeClr val="accent1"/>
-          </a:effectRef>
-          <a:fontRef idx="minor">
-            <a:schemeClr val="lt1"/>
-          </a:fontRef>
-        </p:style>
-        <p:txBody>
-          <a:bodyPr rtlCol="0" anchor="ctr" wrap="square"/>
-          <a:lstStyle/>
-          <a:p>
-            <a:pPr algn="ctr"/>
-          </a:p>
-        </p:txBody>
-      </p:sp>
-      <p:sp>
-        <p:nvSpPr>
-          <p:cNvPr id="13" name="Round Same Side Corner Rectangle 12"/>
-          <p:cNvSpPr/>
-          <p:nvPr/>
-        </p:nvSpPr>
-        <p:spPr>
-          <a:xfrm>
-            <a:off x="2354580" y="3187598"/>
-            <a:ext cx="146304" cy="160934"/>
-          </a:xfrm>
-          <a:prstGeom prst="round2SameRect">
-            <a:avLst>
-              <a:gd name="adj1" fmla="val 45000"/>
-              <a:gd name="adj2" fmla="val 0"/>
-            </a:avLst>
-          </a:prstGeom>
-          <a:noFill/>
-          <a:ln w="12700">
-            <a:solidFill>
-              <a:srgbClr val="FFFFFF"/>
-            </a:solidFill>
-          </a:ln>
-          <a:effectLst/>
-        </p:spPr>
-        <p:style>
-          <a:lnRef idx="1">
-            <a:schemeClr val="accent1"/>
-          </a:lnRef>
-          <a:fillRef idx="3">
-            <a:schemeClr val="accent1"/>
-          </a:fillRef>
-          <a:effectRef idx="2">
-            <a:schemeClr val="accent1"/>
-          </a:effectRef>
-          <a:fontRef idx="minor">
-            <a:schemeClr val="lt1"/>
-          </a:fontRef>
-        </p:style>
-        <p:txBody>
-          <a:bodyPr rtlCol="0" anchor="ctr" wrap="square"/>
-          <a:lstStyle/>
-          <a:p>
-            <a:pPr algn="ctr"/>
-          </a:p>
-        </p:txBody>
-      </p:sp>
-      <p:sp>
-        <p:nvSpPr>
           <p:cNvPr id="14" name="Oval 13"/>
           <p:cNvSpPr/>
           <p:nvPr/>
         </p:nvSpPr>
         <p:spPr>
           <a:xfrm>
-            <a:off x="1156716" y="2651760"/>
-            <a:ext cx="384048" cy="384048"/>
-          </a:xfrm>
-          <a:prstGeom prst="ellipse">
-            <a:avLst/>
-          </a:prstGeom>
-          <a:solidFill>
-            <a:srgbClr val="FFFFFF"/>
-          </a:solidFill>
-          <a:ln w="9525">
-            <a:solidFill>
-              <a:srgbClr val="C8D2DD"/>
-            </a:solidFill>
-          </a:ln>
-          <a:effectLst/>
-        </p:spPr>
-        <p:style>
-          <a:lnRef idx="1">
-            <a:schemeClr val="accent1"/>
-          </a:lnRef>
-          <a:fillRef idx="3">
-            <a:schemeClr val="accent1"/>
-          </a:fillRef>
-          <a:effectRef idx="2">
-            <a:schemeClr val="accent1"/>
-          </a:effectRef>
-          <a:fontRef idx="minor">
-            <a:schemeClr val="lt1"/>
-          </a:fontRef>
-        </p:style>
-        <p:txBody>
-          <a:bodyPr rtlCol="0" anchor="ctr" wrap="square"/>
-          <a:lstStyle/>
-          <a:p>
-            <a:pPr algn="ctr"/>
-          </a:p>
-        </p:txBody>
-      </p:sp>
-      <p:sp>
-        <p:nvSpPr>
-          <p:cNvPr id="15" name="Oval 14"/>
-          <p:cNvSpPr/>
-          <p:nvPr/>
-        </p:nvSpPr>
-        <p:spPr>
-          <a:xfrm>
-            <a:off x="1248156" y="2743200"/>
-            <a:ext cx="201168" cy="201168"/>
+            <a:off x="1314175" y="3192353"/>
+            <a:ext cx="65836" cy="65836"/>
           </a:xfrm>
           <a:prstGeom prst="ellipse">
             <a:avLst/>
@@ -2838,17 +2758,20 @@
       </p:sp>
       <p:sp>
         <p:nvSpPr>
-          <p:cNvPr id="16" name="Oval 15"/>
+          <p:cNvPr id="15" name="Round Same Side Corner Rectangle 14"/>
           <p:cNvSpPr/>
           <p:nvPr/>
         </p:nvSpPr>
         <p:spPr>
           <a:xfrm>
-            <a:off x="1293418" y="2788462"/>
-            <a:ext cx="110642" cy="110642"/>
-          </a:xfrm>
-          <a:prstGeom prst="ellipse">
-            <a:avLst/>
+            <a:off x="1303202" y="3260384"/>
+            <a:ext cx="87782" cy="96560"/>
+          </a:xfrm>
+          <a:prstGeom prst="round2SameRect">
+            <a:avLst>
+              <a:gd name="adj1" fmla="val 45000"/>
+              <a:gd name="adj2" fmla="val 0"/>
+            </a:avLst>
           </a:prstGeom>
           <a:noFill/>
           <a:ln w="12700">
@@ -2882,109 +2805,17 @@
       </p:sp>
       <p:sp>
         <p:nvSpPr>
-          <p:cNvPr id="17" name="Oval 16"/>
+          <p:cNvPr id="16" name="Oval 15"/>
           <p:cNvSpPr/>
           <p:nvPr/>
         </p:nvSpPr>
         <p:spPr>
           <a:xfrm>
-            <a:off x="1330634" y="2825678"/>
-            <a:ext cx="36210" cy="36210"/>
+            <a:off x="1373428" y="3192353"/>
+            <a:ext cx="65836" cy="65836"/>
           </a:xfrm>
           <a:prstGeom prst="ellipse">
             <a:avLst/>
-          </a:prstGeom>
-          <a:solidFill>
-            <a:srgbClr val="411482"/>
-          </a:solidFill>
-          <a:ln>
-            <a:noFill/>
-          </a:ln>
-          <a:effectLst/>
-        </p:spPr>
-        <p:style>
-          <a:lnRef idx="1">
-            <a:schemeClr val="accent1"/>
-          </a:lnRef>
-          <a:fillRef idx="3">
-            <a:schemeClr val="accent1"/>
-          </a:fillRef>
-          <a:effectRef idx="2">
-            <a:schemeClr val="accent1"/>
-          </a:effectRef>
-          <a:fontRef idx="minor">
-            <a:schemeClr val="lt1"/>
-          </a:fontRef>
-        </p:style>
-        <p:txBody>
-          <a:bodyPr rtlCol="0" anchor="ctr" wrap="square"/>
-          <a:lstStyle/>
-          <a:p>
-            <a:pPr algn="ctr"/>
-          </a:p>
-        </p:txBody>
-      </p:sp>
-      <p:sp>
-        <p:nvSpPr>
-          <p:cNvPr id="18" name="Oval 17"/>
-          <p:cNvSpPr/>
-          <p:nvPr/>
-        </p:nvSpPr>
-        <p:spPr>
-          <a:xfrm>
-            <a:off x="3168396" y="2651760"/>
-            <a:ext cx="384048" cy="384048"/>
-          </a:xfrm>
-          <a:prstGeom prst="ellipse">
-            <a:avLst/>
-          </a:prstGeom>
-          <a:solidFill>
-            <a:srgbClr val="FFFFFF"/>
-          </a:solidFill>
-          <a:ln w="9525">
-            <a:solidFill>
-              <a:srgbClr val="C8D2DD"/>
-            </a:solidFill>
-          </a:ln>
-          <a:effectLst/>
-        </p:spPr>
-        <p:style>
-          <a:lnRef idx="1">
-            <a:schemeClr val="accent1"/>
-          </a:lnRef>
-          <a:fillRef idx="3">
-            <a:schemeClr val="accent1"/>
-          </a:fillRef>
-          <a:effectRef idx="2">
-            <a:schemeClr val="accent1"/>
-          </a:effectRef>
-          <a:fontRef idx="minor">
-            <a:schemeClr val="lt1"/>
-          </a:fontRef>
-        </p:style>
-        <p:txBody>
-          <a:bodyPr rtlCol="0" anchor="ctr" wrap="square"/>
-          <a:lstStyle/>
-          <a:p>
-            <a:pPr algn="ctr"/>
-          </a:p>
-        </p:txBody>
-      </p:sp>
-      <p:sp>
-        <p:nvSpPr>
-          <p:cNvPr id="19" name="Rounded Rectangle 18"/>
-          <p:cNvSpPr/>
-          <p:nvPr/>
-        </p:nvSpPr>
-        <p:spPr>
-          <a:xfrm>
-            <a:off x="3298057" y="2757281"/>
-            <a:ext cx="124724" cy="173004"/>
-          </a:xfrm>
-          <a:prstGeom prst="roundRect">
-            <a:avLst>
-              <a:gd name="adj" fmla="val 12000"/>
-            </a:avLst>
           </a:prstGeom>
           <a:noFill/>
           <a:ln w="12700">
@@ -3018,34 +2849,23 @@
       </p:sp>
       <p:sp>
         <p:nvSpPr>
-          <p:cNvPr id="20" name="Freeform 19"/>
+          <p:cNvPr id="17" name="Round Same Side Corner Rectangle 16"/>
           <p:cNvSpPr/>
           <p:nvPr/>
         </p:nvSpPr>
         <p:spPr>
           <a:xfrm>
-            <a:off x="3326221" y="2795503"/>
-            <a:ext cx="68397" cy="0"/>
-          </a:xfrm>
-          <a:custGeom>
-            <a:avLst/>
-            <a:gdLst/>
-            <a:ahLst/>
-            <a:cxnLst/>
-            <a:rect l="l" t="t" r="r" b="b"/>
-            <a:pathLst>
-              <a:path w="68397" h="0">
-                <a:moveTo>
-                  <a:pt x="0" y="0"/>
-                </a:moveTo>
-                <a:lnTo>
-                  <a:pt x="68397" y="0"/>
-                </a:lnTo>
-              </a:path>
-            </a:pathLst>
-          </a:custGeom>
+            <a:off x="1362456" y="3260384"/>
+            <a:ext cx="87782" cy="96560"/>
+          </a:xfrm>
+          <a:prstGeom prst="round2SameRect">
+            <a:avLst>
+              <a:gd name="adj1" fmla="val 45000"/>
+              <a:gd name="adj2" fmla="val 0"/>
+            </a:avLst>
+          </a:prstGeom>
           <a:noFill/>
-          <a:ln w="10795">
+          <a:ln w="12700">
             <a:solidFill>
               <a:srgbClr val="411482"/>
             </a:solidFill>
@@ -3067,7 +2887,7 @@
           </a:fontRef>
         </p:style>
         <p:txBody>
-          <a:bodyPr rtlCol="0" anchor="ctr"/>
+          <a:bodyPr rtlCol="0" anchor="ctr" wrap="square"/>
           <a:lstStyle/>
           <a:p>
             <a:pPr algn="ctr"/>
@@ -3076,660 +2896,14 @@
       </p:sp>
       <p:sp>
         <p:nvSpPr>
-          <p:cNvPr id="21" name="Freeform 20"/>
-          <p:cNvSpPr/>
-          <p:nvPr/>
-        </p:nvSpPr>
-        <p:spPr>
-          <a:xfrm>
-            <a:off x="3326221" y="2837748"/>
-            <a:ext cx="68397" cy="0"/>
-          </a:xfrm>
-          <a:custGeom>
-            <a:avLst/>
-            <a:gdLst/>
-            <a:ahLst/>
-            <a:cxnLst/>
-            <a:rect l="l" t="t" r="r" b="b"/>
-            <a:pathLst>
-              <a:path w="68397" h="0">
-                <a:moveTo>
-                  <a:pt x="0" y="0"/>
-                </a:moveTo>
-                <a:lnTo>
-                  <a:pt x="68397" y="0"/>
-                </a:lnTo>
-              </a:path>
-            </a:pathLst>
-          </a:custGeom>
-          <a:noFill/>
-          <a:ln w="10795">
-            <a:solidFill>
-              <a:srgbClr val="411482"/>
-            </a:solidFill>
-          </a:ln>
-          <a:effectLst/>
-        </p:spPr>
-        <p:style>
-          <a:lnRef idx="1">
-            <a:schemeClr val="accent1"/>
-          </a:lnRef>
-          <a:fillRef idx="3">
-            <a:schemeClr val="accent1"/>
-          </a:fillRef>
-          <a:effectRef idx="2">
-            <a:schemeClr val="accent1"/>
-          </a:effectRef>
-          <a:fontRef idx="minor">
-            <a:schemeClr val="lt1"/>
-          </a:fontRef>
-        </p:style>
-        <p:txBody>
-          <a:bodyPr rtlCol="0" anchor="ctr"/>
-          <a:lstStyle/>
-          <a:p>
-            <a:pPr algn="ctr"/>
-          </a:p>
-        </p:txBody>
-      </p:sp>
-      <p:sp>
-        <p:nvSpPr>
-          <p:cNvPr id="22" name="Freeform 21"/>
-          <p:cNvSpPr/>
-          <p:nvPr/>
-        </p:nvSpPr>
-        <p:spPr>
-          <a:xfrm>
-            <a:off x="3326221" y="2879994"/>
-            <a:ext cx="68397" cy="0"/>
-          </a:xfrm>
-          <a:custGeom>
-            <a:avLst/>
-            <a:gdLst/>
-            <a:ahLst/>
-            <a:cxnLst/>
-            <a:rect l="l" t="t" r="r" b="b"/>
-            <a:pathLst>
-              <a:path w="68397" h="0">
-                <a:moveTo>
-                  <a:pt x="0" y="0"/>
-                </a:moveTo>
-                <a:lnTo>
-                  <a:pt x="68397" y="0"/>
-                </a:lnTo>
-              </a:path>
-            </a:pathLst>
-          </a:custGeom>
-          <a:noFill/>
-          <a:ln w="10795">
-            <a:solidFill>
-              <a:srgbClr val="411482"/>
-            </a:solidFill>
-          </a:ln>
-          <a:effectLst/>
-        </p:spPr>
-        <p:style>
-          <a:lnRef idx="1">
-            <a:schemeClr val="accent1"/>
-          </a:lnRef>
-          <a:fillRef idx="3">
-            <a:schemeClr val="accent1"/>
-          </a:fillRef>
-          <a:effectRef idx="2">
-            <a:schemeClr val="accent1"/>
-          </a:effectRef>
-          <a:fontRef idx="minor">
-            <a:schemeClr val="lt1"/>
-          </a:fontRef>
-        </p:style>
-        <p:txBody>
-          <a:bodyPr rtlCol="0" anchor="ctr"/>
-          <a:lstStyle/>
-          <a:p>
-            <a:pPr algn="ctr"/>
-          </a:p>
-        </p:txBody>
-      </p:sp>
-      <p:sp>
-        <p:nvSpPr>
-          <p:cNvPr id="23" name="Oval 22"/>
-          <p:cNvSpPr/>
-          <p:nvPr/>
-        </p:nvSpPr>
-        <p:spPr>
-          <a:xfrm>
-            <a:off x="1156716" y="3383279"/>
-            <a:ext cx="384048" cy="384048"/>
-          </a:xfrm>
-          <a:prstGeom prst="ellipse">
-            <a:avLst/>
-          </a:prstGeom>
-          <a:solidFill>
-            <a:srgbClr val="FFFFFF"/>
-          </a:solidFill>
-          <a:ln w="9525">
-            <a:solidFill>
-              <a:srgbClr val="C8D2DD"/>
-            </a:solidFill>
-          </a:ln>
-          <a:effectLst/>
-        </p:spPr>
-        <p:style>
-          <a:lnRef idx="1">
-            <a:schemeClr val="accent1"/>
-          </a:lnRef>
-          <a:fillRef idx="3">
-            <a:schemeClr val="accent1"/>
-          </a:fillRef>
-          <a:effectRef idx="2">
-            <a:schemeClr val="accent1"/>
-          </a:effectRef>
-          <a:fontRef idx="minor">
-            <a:schemeClr val="lt1"/>
-          </a:fontRef>
-        </p:style>
-        <p:txBody>
-          <a:bodyPr rtlCol="0" anchor="ctr" wrap="square"/>
-          <a:lstStyle/>
-          <a:p>
-            <a:pPr algn="ctr"/>
-          </a:p>
-        </p:txBody>
-      </p:sp>
-      <p:sp>
-        <p:nvSpPr>
-          <p:cNvPr id="24" name="Rounded Rectangle 23"/>
-          <p:cNvSpPr/>
-          <p:nvPr/>
-        </p:nvSpPr>
-        <p:spPr>
-          <a:xfrm>
-            <a:off x="1328623" y="3500871"/>
-            <a:ext cx="40233" cy="40233"/>
-          </a:xfrm>
-          <a:prstGeom prst="roundRect">
-            <a:avLst>
-              <a:gd name="adj" fmla="val 25000"/>
-            </a:avLst>
-          </a:prstGeom>
-          <a:solidFill>
-            <a:srgbClr val="411482"/>
-          </a:solidFill>
-          <a:ln>
-            <a:noFill/>
-          </a:ln>
-          <a:effectLst/>
-        </p:spPr>
-        <p:style>
-          <a:lnRef idx="1">
-            <a:schemeClr val="accent1"/>
-          </a:lnRef>
-          <a:fillRef idx="3">
-            <a:schemeClr val="accent1"/>
-          </a:fillRef>
-          <a:effectRef idx="2">
-            <a:schemeClr val="accent1"/>
-          </a:effectRef>
-          <a:fontRef idx="minor">
-            <a:schemeClr val="lt1"/>
-          </a:fontRef>
-        </p:style>
-        <p:txBody>
-          <a:bodyPr rtlCol="0" anchor="ctr" wrap="square"/>
-          <a:lstStyle/>
-          <a:p>
-            <a:pPr algn="ctr"/>
-          </a:p>
-        </p:txBody>
-      </p:sp>
-      <p:sp>
-        <p:nvSpPr>
-          <p:cNvPr id="25" name="Rounded Rectangle 24"/>
-          <p:cNvSpPr/>
-          <p:nvPr/>
-        </p:nvSpPr>
-        <p:spPr>
-          <a:xfrm>
-            <a:off x="1284366" y="3603467"/>
-            <a:ext cx="32186" cy="32186"/>
-          </a:xfrm>
-          <a:prstGeom prst="roundRect">
-            <a:avLst>
-              <a:gd name="adj" fmla="val 25000"/>
-            </a:avLst>
-          </a:prstGeom>
-          <a:solidFill>
-            <a:srgbClr val="411482"/>
-          </a:solidFill>
-          <a:ln>
-            <a:noFill/>
-          </a:ln>
-          <a:effectLst/>
-        </p:spPr>
-        <p:style>
-          <a:lnRef idx="1">
-            <a:schemeClr val="accent1"/>
-          </a:lnRef>
-          <a:fillRef idx="3">
-            <a:schemeClr val="accent1"/>
-          </a:fillRef>
-          <a:effectRef idx="2">
-            <a:schemeClr val="accent1"/>
-          </a:effectRef>
-          <a:fontRef idx="minor">
-            <a:schemeClr val="lt1"/>
-          </a:fontRef>
-        </p:style>
-        <p:txBody>
-          <a:bodyPr rtlCol="0" anchor="ctr" wrap="square"/>
-          <a:lstStyle/>
-          <a:p>
-            <a:pPr algn="ctr"/>
-          </a:p>
-        </p:txBody>
-      </p:sp>
-      <p:sp>
-        <p:nvSpPr>
-          <p:cNvPr id="26" name="Rounded Rectangle 25"/>
-          <p:cNvSpPr/>
-          <p:nvPr/>
-        </p:nvSpPr>
-        <p:spPr>
-          <a:xfrm>
-            <a:off x="1332646" y="3603467"/>
-            <a:ext cx="32186" cy="32186"/>
-          </a:xfrm>
-          <a:prstGeom prst="roundRect">
-            <a:avLst>
-              <a:gd name="adj" fmla="val 25000"/>
-            </a:avLst>
-          </a:prstGeom>
-          <a:solidFill>
-            <a:srgbClr val="411482"/>
-          </a:solidFill>
-          <a:ln>
-            <a:noFill/>
-          </a:ln>
-          <a:effectLst/>
-        </p:spPr>
-        <p:style>
-          <a:lnRef idx="1">
-            <a:schemeClr val="accent1"/>
-          </a:lnRef>
-          <a:fillRef idx="3">
-            <a:schemeClr val="accent1"/>
-          </a:fillRef>
-          <a:effectRef idx="2">
-            <a:schemeClr val="accent1"/>
-          </a:effectRef>
-          <a:fontRef idx="minor">
-            <a:schemeClr val="lt1"/>
-          </a:fontRef>
-        </p:style>
-        <p:txBody>
-          <a:bodyPr rtlCol="0" anchor="ctr" wrap="square"/>
-          <a:lstStyle/>
-          <a:p>
-            <a:pPr algn="ctr"/>
-          </a:p>
-        </p:txBody>
-      </p:sp>
-      <p:sp>
-        <p:nvSpPr>
-          <p:cNvPr id="27" name="Rounded Rectangle 26"/>
-          <p:cNvSpPr/>
-          <p:nvPr/>
-        </p:nvSpPr>
-        <p:spPr>
-          <a:xfrm>
-            <a:off x="1380926" y="3603467"/>
-            <a:ext cx="32186" cy="32186"/>
-          </a:xfrm>
-          <a:prstGeom prst="roundRect">
-            <a:avLst>
-              <a:gd name="adj" fmla="val 25000"/>
-            </a:avLst>
-          </a:prstGeom>
-          <a:solidFill>
-            <a:srgbClr val="411482"/>
-          </a:solidFill>
-          <a:ln>
-            <a:noFill/>
-          </a:ln>
-          <a:effectLst/>
-        </p:spPr>
-        <p:style>
-          <a:lnRef idx="1">
-            <a:schemeClr val="accent1"/>
-          </a:lnRef>
-          <a:fillRef idx="3">
-            <a:schemeClr val="accent1"/>
-          </a:fillRef>
-          <a:effectRef idx="2">
-            <a:schemeClr val="accent1"/>
-          </a:effectRef>
-          <a:fontRef idx="minor">
-            <a:schemeClr val="lt1"/>
-          </a:fontRef>
-        </p:style>
-        <p:txBody>
-          <a:bodyPr rtlCol="0" anchor="ctr" wrap="square"/>
-          <a:lstStyle/>
-          <a:p>
-            <a:pPr algn="ctr"/>
-          </a:p>
-        </p:txBody>
-      </p:sp>
-      <p:sp>
-        <p:nvSpPr>
-          <p:cNvPr id="28" name="Freeform 27"/>
-          <p:cNvSpPr/>
-          <p:nvPr/>
-        </p:nvSpPr>
-        <p:spPr>
-          <a:xfrm>
-            <a:off x="1300459" y="3583350"/>
-            <a:ext cx="96561" cy="0"/>
-          </a:xfrm>
-          <a:custGeom>
-            <a:avLst/>
-            <a:gdLst/>
-            <a:ahLst/>
-            <a:cxnLst/>
-            <a:rect l="l" t="t" r="r" b="b"/>
-            <a:pathLst>
-              <a:path w="96561" h="0">
-                <a:moveTo>
-                  <a:pt x="0" y="0"/>
-                </a:moveTo>
-                <a:lnTo>
-                  <a:pt x="96561" y="0"/>
-                </a:lnTo>
-              </a:path>
-            </a:pathLst>
-          </a:custGeom>
-          <a:noFill/>
-          <a:ln w="10795">
-            <a:solidFill>
-              <a:srgbClr val="411482"/>
-            </a:solidFill>
-          </a:ln>
-          <a:effectLst/>
-        </p:spPr>
-        <p:style>
-          <a:lnRef idx="1">
-            <a:schemeClr val="accent1"/>
-          </a:lnRef>
-          <a:fillRef idx="3">
-            <a:schemeClr val="accent1"/>
-          </a:fillRef>
-          <a:effectRef idx="2">
-            <a:schemeClr val="accent1"/>
-          </a:effectRef>
-          <a:fontRef idx="minor">
-            <a:schemeClr val="lt1"/>
-          </a:fontRef>
-        </p:style>
-        <p:txBody>
-          <a:bodyPr rtlCol="0" anchor="ctr"/>
-          <a:lstStyle/>
-          <a:p>
-            <a:pPr algn="ctr"/>
-          </a:p>
-        </p:txBody>
-      </p:sp>
-      <p:sp>
-        <p:nvSpPr>
-          <p:cNvPr id="29" name="Oval 28"/>
-          <p:cNvSpPr/>
-          <p:nvPr/>
-        </p:nvSpPr>
-        <p:spPr>
-          <a:xfrm>
-            <a:off x="3168396" y="3383279"/>
-            <a:ext cx="384048" cy="384048"/>
-          </a:xfrm>
-          <a:prstGeom prst="ellipse">
-            <a:avLst/>
-          </a:prstGeom>
-          <a:solidFill>
-            <a:srgbClr val="FFFFFF"/>
-          </a:solidFill>
-          <a:ln w="9525">
-            <a:solidFill>
-              <a:srgbClr val="C8D2DD"/>
-            </a:solidFill>
-          </a:ln>
-          <a:effectLst/>
-        </p:spPr>
-        <p:style>
-          <a:lnRef idx="1">
-            <a:schemeClr val="accent1"/>
-          </a:lnRef>
-          <a:fillRef idx="3">
-            <a:schemeClr val="accent1"/>
-          </a:fillRef>
-          <a:effectRef idx="2">
-            <a:schemeClr val="accent1"/>
-          </a:effectRef>
-          <a:fontRef idx="minor">
-            <a:schemeClr val="lt1"/>
-          </a:fontRef>
-        </p:style>
-        <p:txBody>
-          <a:bodyPr rtlCol="0" anchor="ctr" wrap="square"/>
-          <a:lstStyle/>
-          <a:p>
-            <a:pPr algn="ctr"/>
-          </a:p>
-        </p:txBody>
-      </p:sp>
-      <p:sp>
-        <p:nvSpPr>
-          <p:cNvPr id="30" name="Rounded Rectangle 29"/>
-          <p:cNvSpPr/>
-          <p:nvPr/>
-        </p:nvSpPr>
-        <p:spPr>
-          <a:xfrm>
-            <a:off x="3290011" y="3569268"/>
-            <a:ext cx="36210" cy="68397"/>
-          </a:xfrm>
-          <a:prstGeom prst="roundRect">
-            <a:avLst>
-              <a:gd name="adj" fmla="val 30000"/>
-            </a:avLst>
-          </a:prstGeom>
-          <a:solidFill>
-            <a:srgbClr val="411482"/>
-          </a:solidFill>
-          <a:ln>
-            <a:noFill/>
-          </a:ln>
-          <a:effectLst/>
-        </p:spPr>
-        <p:style>
-          <a:lnRef idx="1">
-            <a:schemeClr val="accent1"/>
-          </a:lnRef>
-          <a:fillRef idx="3">
-            <a:schemeClr val="accent1"/>
-          </a:fillRef>
-          <a:effectRef idx="2">
-            <a:schemeClr val="accent1"/>
-          </a:effectRef>
-          <a:fontRef idx="minor">
-            <a:schemeClr val="lt1"/>
-          </a:fontRef>
-        </p:style>
-        <p:txBody>
-          <a:bodyPr rtlCol="0" anchor="ctr" wrap="square"/>
-          <a:lstStyle/>
-          <a:p>
-            <a:pPr algn="ctr"/>
-          </a:p>
-        </p:txBody>
-      </p:sp>
-      <p:sp>
-        <p:nvSpPr>
-          <p:cNvPr id="31" name="Rounded Rectangle 30"/>
-          <p:cNvSpPr/>
-          <p:nvPr/>
-        </p:nvSpPr>
-        <p:spPr>
-          <a:xfrm>
-            <a:off x="3344326" y="3520988"/>
-            <a:ext cx="36210" cy="116677"/>
-          </a:xfrm>
-          <a:prstGeom prst="roundRect">
-            <a:avLst>
-              <a:gd name="adj" fmla="val 30000"/>
-            </a:avLst>
-          </a:prstGeom>
-          <a:solidFill>
-            <a:srgbClr val="411482"/>
-          </a:solidFill>
-          <a:ln>
-            <a:noFill/>
-          </a:ln>
-          <a:effectLst/>
-        </p:spPr>
-        <p:style>
-          <a:lnRef idx="1">
-            <a:schemeClr val="accent1"/>
-          </a:lnRef>
-          <a:fillRef idx="3">
-            <a:schemeClr val="accent1"/>
-          </a:fillRef>
-          <a:effectRef idx="2">
-            <a:schemeClr val="accent1"/>
-          </a:effectRef>
-          <a:fontRef idx="minor">
-            <a:schemeClr val="lt1"/>
-          </a:fontRef>
-        </p:style>
-        <p:txBody>
-          <a:bodyPr rtlCol="0" anchor="ctr" wrap="square"/>
-          <a:lstStyle/>
-          <a:p>
-            <a:pPr algn="ctr"/>
-          </a:p>
-        </p:txBody>
-      </p:sp>
-      <p:sp>
-        <p:nvSpPr>
-          <p:cNvPr id="32" name="Rounded Rectangle 31"/>
-          <p:cNvSpPr/>
-          <p:nvPr/>
-        </p:nvSpPr>
-        <p:spPr>
-          <a:xfrm>
-            <a:off x="3398641" y="3468684"/>
-            <a:ext cx="36210" cy="168981"/>
-          </a:xfrm>
-          <a:prstGeom prst="roundRect">
-            <a:avLst>
-              <a:gd name="adj" fmla="val 30000"/>
-            </a:avLst>
-          </a:prstGeom>
-          <a:solidFill>
-            <a:srgbClr val="411482"/>
-          </a:solidFill>
-          <a:ln>
-            <a:noFill/>
-          </a:ln>
-          <a:effectLst/>
-        </p:spPr>
-        <p:style>
-          <a:lnRef idx="1">
-            <a:schemeClr val="accent1"/>
-          </a:lnRef>
-          <a:fillRef idx="3">
-            <a:schemeClr val="accent1"/>
-          </a:fillRef>
-          <a:effectRef idx="2">
-            <a:schemeClr val="accent1"/>
-          </a:effectRef>
-          <a:fontRef idx="minor">
-            <a:schemeClr val="lt1"/>
-          </a:fontRef>
-        </p:style>
-        <p:txBody>
-          <a:bodyPr rtlCol="0" anchor="ctr" wrap="square"/>
-          <a:lstStyle/>
-          <a:p>
-            <a:pPr algn="ctr"/>
-          </a:p>
-        </p:txBody>
-      </p:sp>
-      <p:sp>
-        <p:nvSpPr>
-          <p:cNvPr id="33" name="Freeform 32"/>
-          <p:cNvSpPr/>
-          <p:nvPr/>
-        </p:nvSpPr>
-        <p:spPr>
-          <a:xfrm>
-            <a:off x="832104" y="3950208"/>
-            <a:ext cx="3044952" cy="0"/>
-          </a:xfrm>
-          <a:custGeom>
-            <a:avLst/>
-            <a:gdLst/>
-            <a:ahLst/>
-            <a:cxnLst/>
-            <a:rect l="l" t="t" r="r" b="b"/>
-            <a:pathLst>
-              <a:path w="3044952" h="0">
-                <a:moveTo>
-                  <a:pt x="0" y="0"/>
-                </a:moveTo>
-                <a:lnTo>
-                  <a:pt x="3044952" y="0"/>
-                </a:lnTo>
-              </a:path>
-            </a:pathLst>
-          </a:custGeom>
-          <a:noFill/>
-          <a:ln w="9525">
-            <a:solidFill>
-              <a:srgbClr val="E6EBF5"/>
-            </a:solidFill>
-          </a:ln>
-          <a:effectLst/>
-        </p:spPr>
-        <p:style>
-          <a:lnRef idx="1">
-            <a:schemeClr val="accent1"/>
-          </a:lnRef>
-          <a:fillRef idx="3">
-            <a:schemeClr val="accent1"/>
-          </a:fillRef>
-          <a:effectRef idx="2">
-            <a:schemeClr val="accent1"/>
-          </a:effectRef>
-          <a:fontRef idx="minor">
-            <a:schemeClr val="lt1"/>
-          </a:fontRef>
-        </p:style>
-        <p:txBody>
-          <a:bodyPr rtlCol="0" anchor="ctr"/>
-          <a:lstStyle/>
-          <a:p>
-            <a:pPr algn="ctr"/>
-          </a:p>
-        </p:txBody>
-      </p:sp>
-      <p:sp>
-        <p:nvSpPr>
-          <p:cNvPr id="34" name="TextBox 33"/>
+          <p:cNvPr id="18" name="TextBox 17"/>
           <p:cNvSpPr txBox="1"/>
           <p:nvPr/>
         </p:nvSpPr>
         <p:spPr>
           <a:xfrm>
-            <a:off x="832104" y="4059935"/>
-            <a:ext cx="1828800" cy="201168"/>
+            <a:off x="1709928" y="3035808"/>
+            <a:ext cx="2103120" cy="475488"/>
           </a:xfrm>
           <a:prstGeom prst="rect">
             <a:avLst/>
@@ -3737,90 +2911,7 @@
           <a:noFill/>
         </p:spPr>
         <p:txBody>
-          <a:bodyPr wrap="square" lIns="0" rIns="0" tIns="0" bIns="0" anchor="t">
-            <a:spAutoFit/>
-          </a:bodyPr>
-          <a:lstStyle/>
-          <a:p>
-            <a:pPr algn="l">
-              <a:spcAft>
-                <a:spcPts val="0"/>
-              </a:spcAft>
-            </a:pPr>
-            <a:r>
-              <a:rPr sz="900" b="1">
-                <a:solidFill>
-                  <a:srgbClr val="411482"/>
-                </a:solidFill>
-                <a:latin typeface="Aptos"/>
-              </a:rPr>
-              <a:t>HIGHLIGHTS</a:t>
-            </a:r>
-          </a:p>
-        </p:txBody>
-      </p:sp>
-      <p:sp>
-        <p:nvSpPr>
-          <p:cNvPr id="35" name="Oval 34"/>
-          <p:cNvSpPr/>
-          <p:nvPr/>
-        </p:nvSpPr>
-        <p:spPr>
-          <a:xfrm>
-            <a:off x="850392" y="4425696"/>
-            <a:ext cx="82296" cy="82296"/>
-          </a:xfrm>
-          <a:prstGeom prst="ellipse">
-            <a:avLst/>
-          </a:prstGeom>
-          <a:solidFill>
-            <a:srgbClr val="411482"/>
-          </a:solidFill>
-          <a:ln>
-            <a:noFill/>
-          </a:ln>
-          <a:effectLst/>
-        </p:spPr>
-        <p:style>
-          <a:lnRef idx="1">
-            <a:schemeClr val="accent1"/>
-          </a:lnRef>
-          <a:fillRef idx="3">
-            <a:schemeClr val="accent1"/>
-          </a:fillRef>
-          <a:effectRef idx="2">
-            <a:schemeClr val="accent1"/>
-          </a:effectRef>
-          <a:fontRef idx="minor">
-            <a:schemeClr val="lt1"/>
-          </a:fontRef>
-        </p:style>
-        <p:txBody>
-          <a:bodyPr rtlCol="0" anchor="ctr" wrap="square"/>
-          <a:lstStyle/>
-          <a:p>
-            <a:pPr algn="ctr"/>
-          </a:p>
-        </p:txBody>
-      </p:sp>
-      <p:sp>
-        <p:nvSpPr>
-          <p:cNvPr id="36" name="TextBox 35"/>
-          <p:cNvSpPr txBox="1"/>
-          <p:nvPr/>
-        </p:nvSpPr>
-        <p:spPr>
-          <a:xfrm>
-            <a:off x="1051560" y="4334256"/>
-            <a:ext cx="2825496" cy="347472"/>
-          </a:xfrm>
-          <a:prstGeom prst="rect">
-            <a:avLst/>
-          </a:prstGeom>
-          <a:noFill/>
-        </p:spPr>
-        <p:txBody>
-          <a:bodyPr wrap="square" lIns="0" rIns="0" tIns="0" bIns="0" anchor="t">
+          <a:bodyPr wrap="square" lIns="0" rIns="0" tIns="0" bIns="0" anchor="ctr">
             <a:spAutoFit/>
           </a:bodyPr>
           <a:lstStyle/>
@@ -3834,39 +2925,76 @@
               </a:spcAft>
             </a:pPr>
             <a:r>
-              <a:rPr sz="1100" b="1">
-                <a:solidFill>
-                  <a:srgbClr val="411482"/>
-                </a:solidFill>
-                <a:latin typeface="Aptos"/>
-              </a:rPr>
-              <a:t>1st</a:t>
-            </a:r>
-            <a:r>
-              <a:rPr sz="950" b="0">
+              <a:rPr sz="1000" b="0">
                 <a:solidFill>
                   <a:srgbClr val="000000"/>
                 </a:solidFill>
                 <a:latin typeface="Aptos"/>
               </a:rPr>
-              <a:t> Advisor Day completed</a:t>
+              <a:t>CXO access &amp; engagement</a:t>
             </a:r>
           </a:p>
         </p:txBody>
       </p:sp>
       <p:sp>
         <p:nvSpPr>
-          <p:cNvPr id="37" name="Oval 36"/>
+          <p:cNvPr id="19" name="Oval 18"/>
           <p:cNvSpPr/>
           <p:nvPr/>
         </p:nvSpPr>
         <p:spPr>
           <a:xfrm>
-            <a:off x="850392" y="4791456"/>
-            <a:ext cx="82296" cy="82296"/>
+            <a:off x="1161288" y="3712463"/>
+            <a:ext cx="402336" cy="402336"/>
           </a:xfrm>
           <a:prstGeom prst="ellipse">
             <a:avLst/>
+          </a:prstGeom>
+          <a:solidFill>
+            <a:srgbClr val="E6EBF5"/>
+          </a:solidFill>
+          <a:ln>
+            <a:noFill/>
+          </a:ln>
+          <a:effectLst/>
+        </p:spPr>
+        <p:style>
+          <a:lnRef idx="1">
+            <a:schemeClr val="accent1"/>
+          </a:lnRef>
+          <a:fillRef idx="3">
+            <a:schemeClr val="accent1"/>
+          </a:fillRef>
+          <a:effectRef idx="2">
+            <a:schemeClr val="accent1"/>
+          </a:effectRef>
+          <a:fontRef idx="minor">
+            <a:schemeClr val="lt1"/>
+          </a:fontRef>
+        </p:style>
+        <p:txBody>
+          <a:bodyPr rtlCol="0" anchor="ctr" wrap="square"/>
+          <a:lstStyle/>
+          <a:p>
+            <a:pPr algn="ctr"/>
+          </a:p>
+        </p:txBody>
+      </p:sp>
+      <p:sp>
+        <p:nvSpPr>
+          <p:cNvPr id="20" name="Rounded Rectangle 19"/>
+          <p:cNvSpPr/>
+          <p:nvPr/>
+        </p:nvSpPr>
+        <p:spPr>
+          <a:xfrm>
+            <a:off x="1285646" y="3907048"/>
+            <a:ext cx="39502" cy="74615"/>
+          </a:xfrm>
+          <a:prstGeom prst="roundRect">
+            <a:avLst>
+              <a:gd name="adj" fmla="val 30000"/>
+            </a:avLst>
           </a:prstGeom>
           <a:solidFill>
             <a:srgbClr val="411482"/>
@@ -3900,14 +3028,106 @@
       </p:sp>
       <p:sp>
         <p:nvSpPr>
-          <p:cNvPr id="38" name="TextBox 37"/>
+          <p:cNvPr id="21" name="Rounded Rectangle 20"/>
+          <p:cNvSpPr/>
+          <p:nvPr/>
+        </p:nvSpPr>
+        <p:spPr>
+          <a:xfrm>
+            <a:off x="1344899" y="3854378"/>
+            <a:ext cx="39502" cy="127284"/>
+          </a:xfrm>
+          <a:prstGeom prst="roundRect">
+            <a:avLst>
+              <a:gd name="adj" fmla="val 30000"/>
+            </a:avLst>
+          </a:prstGeom>
+          <a:solidFill>
+            <a:srgbClr val="411482"/>
+          </a:solidFill>
+          <a:ln>
+            <a:noFill/>
+          </a:ln>
+          <a:effectLst/>
+        </p:spPr>
+        <p:style>
+          <a:lnRef idx="1">
+            <a:schemeClr val="accent1"/>
+          </a:lnRef>
+          <a:fillRef idx="3">
+            <a:schemeClr val="accent1"/>
+          </a:fillRef>
+          <a:effectRef idx="2">
+            <a:schemeClr val="accent1"/>
+          </a:effectRef>
+          <a:fontRef idx="minor">
+            <a:schemeClr val="lt1"/>
+          </a:fontRef>
+        </p:style>
+        <p:txBody>
+          <a:bodyPr rtlCol="0" anchor="ctr" wrap="square"/>
+          <a:lstStyle/>
+          <a:p>
+            <a:pPr algn="ctr"/>
+          </a:p>
+        </p:txBody>
+      </p:sp>
+      <p:sp>
+        <p:nvSpPr>
+          <p:cNvPr id="22" name="Rounded Rectangle 21"/>
+          <p:cNvSpPr/>
+          <p:nvPr/>
+        </p:nvSpPr>
+        <p:spPr>
+          <a:xfrm>
+            <a:off x="1404152" y="3797320"/>
+            <a:ext cx="39502" cy="184343"/>
+          </a:xfrm>
+          <a:prstGeom prst="roundRect">
+            <a:avLst>
+              <a:gd name="adj" fmla="val 30000"/>
+            </a:avLst>
+          </a:prstGeom>
+          <a:solidFill>
+            <a:srgbClr val="411482"/>
+          </a:solidFill>
+          <a:ln>
+            <a:noFill/>
+          </a:ln>
+          <a:effectLst/>
+        </p:spPr>
+        <p:style>
+          <a:lnRef idx="1">
+            <a:schemeClr val="accent1"/>
+          </a:lnRef>
+          <a:fillRef idx="3">
+            <a:schemeClr val="accent1"/>
+          </a:fillRef>
+          <a:effectRef idx="2">
+            <a:schemeClr val="accent1"/>
+          </a:effectRef>
+          <a:fontRef idx="minor">
+            <a:schemeClr val="lt1"/>
+          </a:fontRef>
+        </p:style>
+        <p:txBody>
+          <a:bodyPr rtlCol="0" anchor="ctr" wrap="square"/>
+          <a:lstStyle/>
+          <a:p>
+            <a:pPr algn="ctr"/>
+          </a:p>
+        </p:txBody>
+      </p:sp>
+      <p:sp>
+        <p:nvSpPr>
+          <p:cNvPr id="23" name="TextBox 22"/>
           <p:cNvSpPr txBox="1"/>
           <p:nvPr/>
         </p:nvSpPr>
         <p:spPr>
           <a:xfrm>
-            <a:off x="1051560" y="4700016"/>
-            <a:ext cx="2825496" cy="347472"/>
+            <a:off x="1709928" y="3675887"/>
+            <a:ext cx="2103120" cy="475488"/>
           </a:xfrm>
           <a:prstGeom prst="rect">
             <a:avLst/>
@@ -3915,7 +3135,7 @@
           <a:noFill/>
         </p:spPr>
         <p:txBody>
-          <a:bodyPr wrap="square" lIns="0" rIns="0" tIns="0" bIns="0" anchor="t">
+          <a:bodyPr wrap="square" lIns="0" rIns="0" tIns="0" bIns="0" anchor="ctr">
             <a:spAutoFit/>
           </a:bodyPr>
           <a:lstStyle/>
@@ -3929,39 +3149,32 @@
               </a:spcAft>
             </a:pPr>
             <a:r>
-              <a:rPr sz="1100" b="1">
-                <a:solidFill>
-                  <a:srgbClr val="411482"/>
-                </a:solidFill>
-                <a:latin typeface="Aptos"/>
-              </a:rPr>
-              <a:t>26+</a:t>
-            </a:r>
-            <a:r>
-              <a:rPr sz="950" b="0">
+              <a:rPr sz="1000" b="0">
                 <a:solidFill>
                   <a:srgbClr val="000000"/>
                 </a:solidFill>
                 <a:latin typeface="Aptos"/>
               </a:rPr>
-              <a:t> advisors engaged</a:t>
+              <a:t>Activate BPO platform conversations</a:t>
             </a:r>
           </a:p>
         </p:txBody>
       </p:sp>
       <p:sp>
         <p:nvSpPr>
-          <p:cNvPr id="39" name="Oval 38"/>
+          <p:cNvPr id="24" name="Rounded Rectangle 23"/>
           <p:cNvSpPr/>
           <p:nvPr/>
         </p:nvSpPr>
         <p:spPr>
           <a:xfrm>
-            <a:off x="850392" y="5157216"/>
-            <a:ext cx="82296" cy="82296"/>
-          </a:xfrm>
-          <a:prstGeom prst="ellipse">
-            <a:avLst/>
+            <a:off x="832104" y="4297680"/>
+            <a:ext cx="2980944" cy="54864"/>
+          </a:xfrm>
+          <a:prstGeom prst="roundRect">
+            <a:avLst>
+              <a:gd name="adj" fmla="val 50000"/>
+            </a:avLst>
           </a:prstGeom>
           <a:solidFill>
             <a:srgbClr val="411482"/>
@@ -3995,203 +3208,18 @@
       </p:sp>
       <p:sp>
         <p:nvSpPr>
-          <p:cNvPr id="40" name="TextBox 39"/>
-          <p:cNvSpPr txBox="1"/>
-          <p:nvPr/>
-        </p:nvSpPr>
-        <p:spPr>
-          <a:xfrm>
-            <a:off x="1051560" y="5065776"/>
-            <a:ext cx="2825496" cy="347472"/>
-          </a:xfrm>
-          <a:prstGeom prst="rect">
-            <a:avLst/>
-          </a:prstGeom>
-          <a:noFill/>
-        </p:spPr>
-        <p:txBody>
-          <a:bodyPr wrap="square" lIns="0" rIns="0" tIns="0" bIns="0" anchor="t">
-            <a:spAutoFit/>
-          </a:bodyPr>
-          <a:lstStyle/>
-          <a:p>
-            <a:pPr algn="l">
-              <a:lnSpc>
-                <a:spcPct val="110000"/>
-              </a:lnSpc>
-              <a:spcAft>
-                <a:spcPts val="0"/>
-              </a:spcAft>
-            </a:pPr>
-            <a:r>
-              <a:rPr sz="1100" b="1">
-                <a:solidFill>
-                  <a:srgbClr val="411482"/>
-                </a:solidFill>
-                <a:latin typeface="Aptos"/>
-              </a:rPr>
-              <a:t>89%</a:t>
-            </a:r>
-            <a:r>
-              <a:rPr sz="950" b="0">
-                <a:solidFill>
-                  <a:srgbClr val="000000"/>
-                </a:solidFill>
-                <a:latin typeface="Aptos"/>
-              </a:rPr>
-              <a:t> willing to take AFP to market</a:t>
-            </a:r>
-          </a:p>
-        </p:txBody>
-      </p:sp>
-      <p:sp>
-        <p:nvSpPr>
-          <p:cNvPr id="41" name="Oval 40"/>
+          <p:cNvPr id="25" name="Rounded Rectangle 24"/>
           <p:cNvSpPr/>
           <p:nvPr/>
         </p:nvSpPr>
         <p:spPr>
           <a:xfrm>
-            <a:off x="850392" y="5522976"/>
-            <a:ext cx="82296" cy="82296"/>
-          </a:xfrm>
-          <a:prstGeom prst="ellipse">
-            <a:avLst/>
-          </a:prstGeom>
-          <a:solidFill>
-            <a:srgbClr val="411482"/>
-          </a:solidFill>
-          <a:ln>
-            <a:noFill/>
-          </a:ln>
-          <a:effectLst/>
-        </p:spPr>
-        <p:style>
-          <a:lnRef idx="1">
-            <a:schemeClr val="accent1"/>
-          </a:lnRef>
-          <a:fillRef idx="3">
-            <a:schemeClr val="accent1"/>
-          </a:fillRef>
-          <a:effectRef idx="2">
-            <a:schemeClr val="accent1"/>
-          </a:effectRef>
-          <a:fontRef idx="minor">
-            <a:schemeClr val="lt1"/>
-          </a:fontRef>
-        </p:style>
-        <p:txBody>
-          <a:bodyPr rtlCol="0" anchor="ctr" wrap="square"/>
-          <a:lstStyle/>
-          <a:p>
-            <a:pPr algn="ctr"/>
-          </a:p>
-        </p:txBody>
-      </p:sp>
-      <p:sp>
-        <p:nvSpPr>
-          <p:cNvPr id="42" name="TextBox 41"/>
-          <p:cNvSpPr txBox="1"/>
-          <p:nvPr/>
-        </p:nvSpPr>
-        <p:spPr>
-          <a:xfrm>
-            <a:off x="1051560" y="5431536"/>
-            <a:ext cx="2825496" cy="347472"/>
-          </a:xfrm>
-          <a:prstGeom prst="rect">
-            <a:avLst/>
-          </a:prstGeom>
-          <a:noFill/>
-        </p:spPr>
-        <p:txBody>
-          <a:bodyPr wrap="square" lIns="0" rIns="0" tIns="0" bIns="0" anchor="t">
-            <a:spAutoFit/>
-          </a:bodyPr>
-          <a:lstStyle/>
-          <a:p>
-            <a:pPr algn="l">
-              <a:lnSpc>
-                <a:spcPct val="110000"/>
-              </a:lnSpc>
-              <a:spcAft>
-                <a:spcPts val="0"/>
-              </a:spcAft>
-            </a:pPr>
-            <a:r>
-              <a:rPr sz="1100" b="1">
-                <a:solidFill>
-                  <a:srgbClr val="411482"/>
-                </a:solidFill>
-                <a:latin typeface="Aptos"/>
-              </a:rPr>
-              <a:t>14</a:t>
-            </a:r>
-            <a:r>
-              <a:rPr sz="950" b="0">
-                <a:solidFill>
-                  <a:srgbClr val="000000"/>
-                </a:solidFill>
-                <a:latin typeface="Aptos"/>
-              </a:rPr>
-              <a:t> successful interactions</a:t>
-            </a:r>
-          </a:p>
-        </p:txBody>
-      </p:sp>
-      <p:sp>
-        <p:nvSpPr>
-          <p:cNvPr id="43" name="TextBox 42"/>
-          <p:cNvSpPr txBox="1"/>
-          <p:nvPr/>
-        </p:nvSpPr>
-        <p:spPr>
-          <a:xfrm>
-            <a:off x="1051560" y="5852159"/>
-            <a:ext cx="2825496" cy="201168"/>
-          </a:xfrm>
-          <a:prstGeom prst="rect">
-            <a:avLst/>
-          </a:prstGeom>
-          <a:noFill/>
-        </p:spPr>
-        <p:txBody>
-          <a:bodyPr wrap="square" lIns="0" rIns="0" tIns="0" bIns="0" anchor="t">
-            <a:spAutoFit/>
-          </a:bodyPr>
-          <a:lstStyle/>
-          <a:p>
-            <a:pPr algn="l">
-              <a:spcAft>
-                <a:spcPts val="0"/>
-              </a:spcAft>
-            </a:pPr>
-            <a:r>
-              <a:rPr sz="850" b="0">
-                <a:solidFill>
-                  <a:srgbClr val="8291A0"/>
-                </a:solidFill>
-                <a:latin typeface="Aptos"/>
-              </a:rPr>
-              <a:t>KPMG advisors, Growth Market (AUS)</a:t>
-            </a:r>
-          </a:p>
-        </p:txBody>
-      </p:sp>
-      <p:sp>
-        <p:nvSpPr>
-          <p:cNvPr id="44" name="Rounded Rectangle 43"/>
-          <p:cNvSpPr/>
-          <p:nvPr/>
-        </p:nvSpPr>
-        <p:spPr>
-          <a:xfrm>
-            <a:off x="4334256" y="1426464"/>
-            <a:ext cx="3520440" cy="4663440"/>
+            <a:off x="4366260" y="1481328"/>
+            <a:ext cx="3456432" cy="2962656"/>
           </a:xfrm>
           <a:prstGeom prst="roundRect">
             <a:avLst>
-              <a:gd name="adj" fmla="val 2500"/>
+              <a:gd name="adj" fmla="val 3000"/>
             </a:avLst>
           </a:prstGeom>
           <a:solidFill>
@@ -4228,18 +3256,18 @@
       </p:sp>
       <p:sp>
         <p:nvSpPr>
-          <p:cNvPr id="45" name="Rounded Rectangle 44"/>
+          <p:cNvPr id="26" name="Rounded Rectangle 25"/>
           <p:cNvSpPr/>
           <p:nvPr/>
         </p:nvSpPr>
         <p:spPr>
           <a:xfrm>
-            <a:off x="4572000" y="1645920"/>
-            <a:ext cx="530352" cy="365760"/>
+            <a:off x="4604004" y="1700784"/>
+            <a:ext cx="475488" cy="402336"/>
           </a:xfrm>
           <a:prstGeom prst="roundRect">
             <a:avLst>
-              <a:gd name="adj" fmla="val 18000"/>
+              <a:gd name="adj" fmla="val 20000"/>
             </a:avLst>
           </a:prstGeom>
           <a:solidFill>
@@ -4265,12 +3293,12 @@
           </a:fontRef>
         </p:style>
         <p:txBody>
-          <a:bodyPr rtlCol="0" anchor="ctr" wrap="square" lIns="45720" rIns="45720" tIns="0" bIns="0"/>
+          <a:bodyPr rtlCol="0" anchor="ctr" wrap="square" lIns="73152" rIns="73152" tIns="0" bIns="0"/>
           <a:lstStyle/>
           <a:p>
             <a:pPr algn="ctr">
               <a:lnSpc>
-                <a:spcPct val="95000"/>
+                <a:spcPct val="98000"/>
               </a:lnSpc>
               <a:spcAft>
                 <a:spcPts val="0"/>
@@ -4290,14 +3318,14 @@
       </p:sp>
       <p:sp>
         <p:nvSpPr>
-          <p:cNvPr id="46" name="TextBox 45"/>
+          <p:cNvPr id="27" name="TextBox 26"/>
           <p:cNvSpPr txBox="1"/>
           <p:nvPr/>
         </p:nvSpPr>
         <p:spPr>
           <a:xfrm>
-            <a:off x="5212080" y="1591056"/>
-            <a:ext cx="2404872" cy="475488"/>
+            <a:off x="5207508" y="1682496"/>
+            <a:ext cx="2377439" cy="219456"/>
           </a:xfrm>
           <a:prstGeom prst="rect">
             <a:avLst/>
@@ -4311,34 +3339,12 @@
           <a:lstStyle/>
           <a:p>
             <a:pPr algn="l">
-              <a:lnSpc>
-                <a:spcPct val="95000"/>
-              </a:lnSpc>
               <a:spcAft>
                 <a:spcPts val="0"/>
               </a:spcAft>
             </a:pPr>
             <a:r>
-              <a:rPr sz="1500" b="1">
-                <a:solidFill>
-                  <a:srgbClr val="5F1EBE"/>
-                </a:solidFill>
-                <a:latin typeface="Aptos"/>
-              </a:rPr>
-              <a:t>One story —</a:t>
-            </a:r>
-          </a:p>
-          <a:p>
-            <a:pPr algn="l">
-              <a:lnSpc>
-                <a:spcPct val="95000"/>
-              </a:lnSpc>
-              <a:spcAft>
-                <a:spcPts val="0"/>
-              </a:spcAft>
-            </a:pPr>
-            <a:r>
-              <a:rPr sz="1500" b="1">
+              <a:rPr sz="1250" b="1">
                 <a:solidFill>
                   <a:srgbClr val="5F1EBE"/>
                 </a:solidFill>
@@ -4351,14 +3357,14 @@
       </p:sp>
       <p:sp>
         <p:nvSpPr>
-          <p:cNvPr id="47" name="TextBox 46"/>
+          <p:cNvPr id="28" name="TextBox 27"/>
           <p:cNvSpPr txBox="1"/>
           <p:nvPr/>
         </p:nvSpPr>
         <p:spPr>
           <a:xfrm>
-            <a:off x="4572000" y="2157984"/>
-            <a:ext cx="3044952" cy="384048"/>
+            <a:off x="5207508" y="1938528"/>
+            <a:ext cx="2377439" cy="219456"/>
           </a:xfrm>
           <a:prstGeom prst="rect">
             <a:avLst/>
@@ -4372,39 +3378,36 @@
           <a:lstStyle/>
           <a:p>
             <a:pPr algn="l">
-              <a:lnSpc>
-                <a:spcPct val="110000"/>
-              </a:lnSpc>
               <a:spcAft>
                 <a:spcPts val="0"/>
               </a:spcAft>
             </a:pPr>
             <a:r>
-              <a:rPr sz="1050" b="0">
+              <a:rPr sz="1200" b="0">
                 <a:solidFill>
-                  <a:srgbClr val="8291A0"/>
+                  <a:srgbClr val="000000"/>
                 </a:solidFill>
                 <a:latin typeface="Aptos"/>
               </a:rPr>
-              <a:t>One integrated narrative that delivers greater value together.</a:t>
+              <a:t>Unify the story</a:t>
             </a:r>
           </a:p>
         </p:txBody>
       </p:sp>
       <p:sp>
         <p:nvSpPr>
-          <p:cNvPr id="48" name="Rounded Rectangle 47"/>
+          <p:cNvPr id="29" name="Rounded Rectangle 28"/>
           <p:cNvSpPr/>
           <p:nvPr/>
         </p:nvSpPr>
         <p:spPr>
           <a:xfrm>
-            <a:off x="4832604" y="2752344"/>
-            <a:ext cx="914400" cy="914400"/>
+            <a:off x="4686300" y="2414016"/>
+            <a:ext cx="1234440" cy="960120"/>
           </a:xfrm>
           <a:prstGeom prst="roundRect">
             <a:avLst>
-              <a:gd name="adj" fmla="val 12000"/>
+              <a:gd name="adj" fmla="val 11000"/>
             </a:avLst>
           </a:prstGeom>
           <a:solidFill>
@@ -4439,13 +3442,13 @@
       </p:sp>
       <p:sp>
         <p:nvSpPr>
-          <p:cNvPr id="49" name="Oval 48"/>
+          <p:cNvPr id="30" name="Oval 29"/>
           <p:cNvSpPr/>
           <p:nvPr/>
         </p:nvSpPr>
         <p:spPr>
           <a:xfrm>
-            <a:off x="5187391" y="2943270"/>
+            <a:off x="5201107" y="2623230"/>
             <a:ext cx="204825" cy="87782"/>
           </a:xfrm>
           <a:prstGeom prst="ellipse">
@@ -4483,13 +3486,13 @@
       </p:sp>
       <p:sp>
         <p:nvSpPr>
-          <p:cNvPr id="50" name="Oval 49"/>
+          <p:cNvPr id="31" name="Oval 30"/>
           <p:cNvSpPr/>
           <p:nvPr/>
         </p:nvSpPr>
         <p:spPr>
           <a:xfrm>
-            <a:off x="5187391" y="3036905"/>
+            <a:off x="5201107" y="2716865"/>
             <a:ext cx="204825" cy="87782"/>
           </a:xfrm>
           <a:prstGeom prst="ellipse">
@@ -4527,13 +3530,13 @@
       </p:sp>
       <p:sp>
         <p:nvSpPr>
-          <p:cNvPr id="51" name="Oval 50"/>
+          <p:cNvPr id="32" name="Oval 31"/>
           <p:cNvSpPr/>
           <p:nvPr/>
         </p:nvSpPr>
         <p:spPr>
           <a:xfrm>
-            <a:off x="5187391" y="3130539"/>
+            <a:off x="5201107" y="2810499"/>
             <a:ext cx="204825" cy="87782"/>
           </a:xfrm>
           <a:prstGeom prst="ellipse">
@@ -4571,14 +3574,14 @@
       </p:sp>
       <p:sp>
         <p:nvSpPr>
-          <p:cNvPr id="52" name="TextBox 51"/>
+          <p:cNvPr id="33" name="TextBox 32"/>
           <p:cNvSpPr txBox="1"/>
           <p:nvPr/>
         </p:nvSpPr>
         <p:spPr>
           <a:xfrm>
-            <a:off x="4832604" y="3300984"/>
-            <a:ext cx="914400" cy="237744"/>
+            <a:off x="4686300" y="2999232"/>
+            <a:ext cx="1234440" cy="256032"/>
           </a:xfrm>
           <a:prstGeom prst="rect">
             <a:avLst/>
@@ -4610,18 +3613,18 @@
       </p:sp>
       <p:sp>
         <p:nvSpPr>
-          <p:cNvPr id="53" name="Rounded Rectangle 52"/>
+          <p:cNvPr id="34" name="Rounded Rectangle 33"/>
           <p:cNvSpPr/>
           <p:nvPr/>
         </p:nvSpPr>
         <p:spPr>
           <a:xfrm>
-            <a:off x="6441948" y="2752344"/>
-            <a:ext cx="914400" cy="914400"/>
+            <a:off x="6268212" y="2414016"/>
+            <a:ext cx="1234440" cy="960120"/>
           </a:xfrm>
           <a:prstGeom prst="roundRect">
             <a:avLst>
-              <a:gd name="adj" fmla="val 12000"/>
+              <a:gd name="adj" fmla="val 11000"/>
             </a:avLst>
           </a:prstGeom>
           <a:solidFill>
@@ -4656,23 +3659,25 @@
       </p:sp>
       <p:sp>
         <p:nvSpPr>
-          <p:cNvPr id="54" name="Gear 6 53"/>
+          <p:cNvPr id="35" name="Rounded Rectangle 34"/>
           <p:cNvSpPr/>
           <p:nvPr/>
         </p:nvSpPr>
         <p:spPr>
           <a:xfrm>
-            <a:off x="6773326" y="2937418"/>
-            <a:ext cx="251642" cy="251642"/>
-          </a:xfrm>
-          <a:prstGeom prst="gear6">
-            <a:avLst/>
-          </a:prstGeom>
-          <a:noFill/>
-          <a:ln w="12700">
-            <a:solidFill>
-              <a:srgbClr val="FFFFFF"/>
-            </a:solidFill>
+            <a:off x="6841540" y="2623230"/>
+            <a:ext cx="87782" cy="87782"/>
+          </a:xfrm>
+          <a:prstGeom prst="roundRect">
+            <a:avLst>
+              <a:gd name="adj" fmla="val 22000"/>
+            </a:avLst>
+          </a:prstGeom>
+          <a:solidFill>
+            <a:srgbClr val="FFFFFF"/>
+          </a:solidFill>
+          <a:ln>
+            <a:noFill/>
           </a:ln>
           <a:effectLst/>
         </p:spPr>
@@ -4700,23 +3705,25 @@
       </p:sp>
       <p:sp>
         <p:nvSpPr>
-          <p:cNvPr id="55" name="Oval 54"/>
+          <p:cNvPr id="36" name="Rounded Rectangle 35"/>
           <p:cNvSpPr/>
           <p:nvPr/>
         </p:nvSpPr>
         <p:spPr>
           <a:xfrm>
-            <a:off x="6864035" y="3028127"/>
-            <a:ext cx="70225" cy="70225"/>
-          </a:xfrm>
-          <a:prstGeom prst="ellipse">
-            <a:avLst/>
-          </a:prstGeom>
-          <a:noFill/>
-          <a:ln w="12700">
-            <a:solidFill>
-              <a:srgbClr val="FFFFFF"/>
-            </a:solidFill>
+            <a:off x="6774240" y="2749052"/>
+            <a:ext cx="87782" cy="87782"/>
+          </a:xfrm>
+          <a:prstGeom prst="roundRect">
+            <a:avLst>
+              <a:gd name="adj" fmla="val 22000"/>
+            </a:avLst>
+          </a:prstGeom>
+          <a:solidFill>
+            <a:srgbClr val="FFFFFF"/>
+          </a:solidFill>
+          <a:ln>
+            <a:noFill/>
           </a:ln>
           <a:effectLst/>
         </p:spPr>
@@ -4744,14 +3751,60 @@
       </p:sp>
       <p:sp>
         <p:nvSpPr>
-          <p:cNvPr id="56" name="TextBox 55"/>
+          <p:cNvPr id="37" name="Rounded Rectangle 36"/>
+          <p:cNvSpPr/>
+          <p:nvPr/>
+        </p:nvSpPr>
+        <p:spPr>
+          <a:xfrm>
+            <a:off x="6908840" y="2749052"/>
+            <a:ext cx="87782" cy="87782"/>
+          </a:xfrm>
+          <a:prstGeom prst="roundRect">
+            <a:avLst>
+              <a:gd name="adj" fmla="val 22000"/>
+            </a:avLst>
+          </a:prstGeom>
+          <a:solidFill>
+            <a:srgbClr val="FFFFFF"/>
+          </a:solidFill>
+          <a:ln>
+            <a:noFill/>
+          </a:ln>
+          <a:effectLst/>
+        </p:spPr>
+        <p:style>
+          <a:lnRef idx="1">
+            <a:schemeClr val="accent1"/>
+          </a:lnRef>
+          <a:fillRef idx="3">
+            <a:schemeClr val="accent1"/>
+          </a:fillRef>
+          <a:effectRef idx="2">
+            <a:schemeClr val="accent1"/>
+          </a:effectRef>
+          <a:fontRef idx="minor">
+            <a:schemeClr val="lt1"/>
+          </a:fontRef>
+        </p:style>
+        <p:txBody>
+          <a:bodyPr rtlCol="0" anchor="ctr" wrap="square"/>
+          <a:lstStyle/>
+          <a:p>
+            <a:pPr algn="ctr"/>
+          </a:p>
+        </p:txBody>
+      </p:sp>
+      <p:sp>
+        <p:nvSpPr>
+          <p:cNvPr id="38" name="TextBox 37"/>
           <p:cNvSpPr txBox="1"/>
           <p:nvPr/>
         </p:nvSpPr>
         <p:spPr>
           <a:xfrm>
-            <a:off x="6441948" y="3300984"/>
-            <a:ext cx="914400" cy="237744"/>
+            <a:off x="6268212" y="2999232"/>
+            <a:ext cx="1234440" cy="256032"/>
           </a:xfrm>
           <a:prstGeom prst="rect">
             <a:avLst/>
@@ -4783,19 +3836,17 @@
       </p:sp>
       <p:sp>
         <p:nvSpPr>
-          <p:cNvPr id="57" name="Rounded Rectangle 56"/>
+          <p:cNvPr id="39" name="Oval 38"/>
           <p:cNvSpPr/>
           <p:nvPr/>
         </p:nvSpPr>
         <p:spPr>
           <a:xfrm>
-            <a:off x="5664708" y="2779776"/>
-            <a:ext cx="859536" cy="859536"/>
-          </a:xfrm>
-          <a:prstGeom prst="roundRect">
-            <a:avLst>
-              <a:gd name="adj" fmla="val 14000"/>
-            </a:avLst>
+            <a:off x="5929884" y="2724912"/>
+            <a:ext cx="329184" cy="329184"/>
+          </a:xfrm>
+          <a:prstGeom prst="ellipse">
+            <a:avLst/>
           </a:prstGeom>
           <a:solidFill>
             <a:srgbClr val="FFFFFF"/>
@@ -4822,77 +3873,39 @@
           </a:fontRef>
         </p:style>
         <p:txBody>
-          <a:bodyPr rtlCol="0" anchor="ctr" wrap="square" lIns="45720" rIns="45720" tIns="0" bIns="0"/>
+          <a:bodyPr rtlCol="0" anchor="ctr" wrap="square" lIns="73152" rIns="73152" tIns="0" bIns="0"/>
           <a:lstStyle/>
           <a:p>
             <a:pPr algn="ctr">
               <a:lnSpc>
-                <a:spcPct val="95000"/>
+                <a:spcPct val="98000"/>
               </a:lnSpc>
               <a:spcAft>
                 <a:spcPts val="0"/>
               </a:spcAft>
             </a:pPr>
             <a:r>
-              <a:rPr sz="900" b="1">
+              <a:rPr sz="1400" b="1">
                 <a:solidFill>
                   <a:srgbClr val="5F1EBE"/>
                 </a:solidFill>
                 <a:latin typeface="Aptos"/>
               </a:rPr>
-              <a:t>Stronger</a:t>
+              <a:t>+</a:t>
             </a:r>
           </a:p>
-          <a:p>
-            <a:pPr algn="ctr">
-              <a:lnSpc>
-                <a:spcPct val="95000"/>
-              </a:lnSpc>
-              <a:spcAft>
-                <a:spcPts val="0"/>
-              </a:spcAft>
-            </a:pPr>
-            <a:r>
-              <a:rPr sz="900" b="1">
-                <a:solidFill>
-                  <a:srgbClr val="5F1EBE"/>
-                </a:solidFill>
-                <a:latin typeface="Aptos"/>
-              </a:rPr>
-              <a:t>Customer</a:t>
-            </a:r>
-          </a:p>
-          <a:p>
-            <a:pPr algn="ctr">
-              <a:lnSpc>
-                <a:spcPct val="95000"/>
-              </a:lnSpc>
-              <a:spcAft>
-                <a:spcPts val="0"/>
-              </a:spcAft>
-            </a:pPr>
-            <a:r>
-              <a:rPr sz="900" b="1">
-                <a:solidFill>
-                  <a:srgbClr val="5F1EBE"/>
-                </a:solidFill>
-                <a:latin typeface="Aptos"/>
-              </a:rPr>
-              <a:t>Value</a:t>
-            </a:r>
-          </a:p>
-        </p:txBody>
-      </p:sp>
-      <p:sp>
-        <p:nvSpPr>
-          <p:cNvPr id="58" name="Freeform 57"/>
+        </p:txBody>
+      </p:sp>
+      <p:sp>
+        <p:nvSpPr>
+          <p:cNvPr id="40" name="Freeform 39"/>
           <p:cNvSpPr/>
           <p:nvPr/>
         </p:nvSpPr>
         <p:spPr>
           <a:xfrm>
-            <a:off x="4572000" y="3950208"/>
-            <a:ext cx="3044952" cy="0"/>
+            <a:off x="6094476" y="3438144"/>
+            <a:ext cx="0" cy="146304"/>
           </a:xfrm>
           <a:custGeom>
             <a:avLst/>
@@ -4901,20 +3914,20 @@
             <a:cxnLst/>
             <a:rect l="l" t="t" r="r" b="b"/>
             <a:pathLst>
-              <a:path w="3044952" h="0">
+              <a:path w="0" h="146304">
                 <a:moveTo>
                   <a:pt x="0" y="0"/>
                 </a:moveTo>
                 <a:lnTo>
-                  <a:pt x="3044952" y="0"/>
+                  <a:pt x="0" y="146304"/>
                 </a:lnTo>
               </a:path>
             </a:pathLst>
           </a:custGeom>
           <a:noFill/>
-          <a:ln w="9525">
+          <a:ln w="13970">
             <a:solidFill>
-              <a:srgbClr val="E6EBF5"/>
+              <a:srgbClr val="5F1EBE"/>
             </a:solidFill>
           </a:ln>
           <a:effectLst/>
@@ -4943,62 +3956,40 @@
       </p:sp>
       <p:sp>
         <p:nvSpPr>
-          <p:cNvPr id="59" name="TextBox 58"/>
-          <p:cNvSpPr txBox="1"/>
-          <p:nvPr/>
-        </p:nvSpPr>
-        <p:spPr>
-          <a:xfrm>
-            <a:off x="4572000" y="4059935"/>
-            <a:ext cx="1828800" cy="201168"/>
-          </a:xfrm>
-          <a:prstGeom prst="rect">
+          <p:cNvPr id="41" name="Freeform 40"/>
+          <p:cNvSpPr/>
+          <p:nvPr/>
+        </p:nvSpPr>
+        <p:spPr>
+          <a:xfrm>
+            <a:off x="6039612" y="3529584"/>
+            <a:ext cx="109728" cy="54864"/>
+          </a:xfrm>
+          <a:custGeom>
             <a:avLst/>
-          </a:prstGeom>
+            <a:gdLst/>
+            <a:ahLst/>
+            <a:cxnLst/>
+            <a:rect l="l" t="t" r="r" b="b"/>
+            <a:pathLst>
+              <a:path w="109728" h="54864">
+                <a:moveTo>
+                  <a:pt x="0" y="0"/>
+                </a:moveTo>
+                <a:lnTo>
+                  <a:pt x="54864" y="54864"/>
+                </a:lnTo>
+                <a:lnTo>
+                  <a:pt x="109728" y="0"/>
+                </a:lnTo>
+              </a:path>
+            </a:pathLst>
+          </a:custGeom>
           <a:noFill/>
-        </p:spPr>
-        <p:txBody>
-          <a:bodyPr wrap="square" lIns="0" rIns="0" tIns="0" bIns="0" anchor="t">
-            <a:spAutoFit/>
-          </a:bodyPr>
-          <a:lstStyle/>
-          <a:p>
-            <a:pPr algn="l">
-              <a:spcAft>
-                <a:spcPts val="0"/>
-              </a:spcAft>
-            </a:pPr>
-            <a:r>
-              <a:rPr sz="900" b="1">
-                <a:solidFill>
-                  <a:srgbClr val="5F1EBE"/>
-                </a:solidFill>
-                <a:latin typeface="Aptos"/>
-              </a:rPr>
-              <a:t>HIGHLIGHTS</a:t>
-            </a:r>
-          </a:p>
-        </p:txBody>
-      </p:sp>
-      <p:sp>
-        <p:nvSpPr>
-          <p:cNvPr id="60" name="Oval 59"/>
-          <p:cNvSpPr/>
-          <p:nvPr/>
-        </p:nvSpPr>
-        <p:spPr>
-          <a:xfrm>
-            <a:off x="4590288" y="4425696"/>
-            <a:ext cx="82296" cy="82296"/>
-          </a:xfrm>
-          <a:prstGeom prst="ellipse">
-            <a:avLst/>
-          </a:prstGeom>
-          <a:solidFill>
-            <a:srgbClr val="5F1EBE"/>
-          </a:solidFill>
-          <a:ln>
-            <a:noFill/>
+          <a:ln w="13970">
+            <a:solidFill>
+              <a:srgbClr val="5F1EBE"/>
+            </a:solidFill>
           </a:ln>
           <a:effectLst/>
         </p:spPr>
@@ -5017,7 +4008,7 @@
           </a:fontRef>
         </p:style>
         <p:txBody>
-          <a:bodyPr rtlCol="0" anchor="ctr" wrap="square"/>
+          <a:bodyPr rtlCol="0" anchor="ctr"/>
           <a:lstStyle/>
           <a:p>
             <a:pPr algn="ctr"/>
@@ -5026,43 +4017,73 @@
       </p:sp>
       <p:sp>
         <p:nvSpPr>
-          <p:cNvPr id="61" name="TextBox 60"/>
-          <p:cNvSpPr txBox="1"/>
-          <p:nvPr/>
-        </p:nvSpPr>
-        <p:spPr>
-          <a:xfrm>
-            <a:off x="4791456" y="4334256"/>
-            <a:ext cx="2825496" cy="347472"/>
-          </a:xfrm>
-          <a:prstGeom prst="rect">
-            <a:avLst/>
-          </a:prstGeom>
-          <a:noFill/>
-        </p:spPr>
-        <p:txBody>
-          <a:bodyPr wrap="square" lIns="0" rIns="0" tIns="0" bIns="0" anchor="t">
-            <a:spAutoFit/>
-          </a:bodyPr>
-          <a:lstStyle/>
-          <a:p>
-            <a:pPr algn="l">
+          <p:cNvPr id="42" name="Rounded Rectangle 41"/>
+          <p:cNvSpPr/>
+          <p:nvPr/>
+        </p:nvSpPr>
+        <p:spPr>
+          <a:xfrm>
+            <a:off x="4604004" y="3657600"/>
+            <a:ext cx="2980944" cy="603504"/>
+          </a:xfrm>
+          <a:prstGeom prst="roundRect">
+            <a:avLst>
+              <a:gd name="adj" fmla="val 14000"/>
+            </a:avLst>
+          </a:prstGeom>
+          <a:solidFill>
+            <a:srgbClr val="E6EBF5"/>
+          </a:solidFill>
+          <a:ln>
+            <a:noFill/>
+          </a:ln>
+          <a:effectLst/>
+        </p:spPr>
+        <p:style>
+          <a:lnRef idx="1">
+            <a:schemeClr val="accent1"/>
+          </a:lnRef>
+          <a:fillRef idx="3">
+            <a:schemeClr val="accent1"/>
+          </a:fillRef>
+          <a:effectRef idx="2">
+            <a:schemeClr val="accent1"/>
+          </a:effectRef>
+          <a:fontRef idx="minor">
+            <a:schemeClr val="lt1"/>
+          </a:fontRef>
+        </p:style>
+        <p:txBody>
+          <a:bodyPr rtlCol="0" anchor="ctr" wrap="square" lIns="73152" rIns="73152" tIns="0" bIns="0"/>
+          <a:lstStyle/>
+          <a:p>
+            <a:pPr algn="ctr">
               <a:lnSpc>
-                <a:spcPct val="110000"/>
+                <a:spcPct val="98000"/>
               </a:lnSpc>
               <a:spcAft>
                 <a:spcPts val="0"/>
               </a:spcAft>
             </a:pPr>
             <a:r>
-              <a:rPr sz="1100" b="1">
+              <a:rPr sz="1050" b="1">
                 <a:solidFill>
                   <a:srgbClr val="5F1EBE"/>
                 </a:solidFill>
                 <a:latin typeface="Aptos"/>
               </a:rPr>
-              <a:t>5+</a:t>
+              <a:t>ONE INTEGRATED NARRATIVE</a:t>
             </a:r>
+          </a:p>
+          <a:p>
+            <a:pPr algn="ctr">
+              <a:lnSpc>
+                <a:spcPct val="98000"/>
+              </a:lnSpc>
+              <a:spcAft>
+                <a:spcPts val="0"/>
+              </a:spcAft>
+            </a:pPr>
             <a:r>
               <a:rPr sz="950" b="0">
                 <a:solidFill>
@@ -5070,24 +4091,26 @@
                 </a:solidFill>
                 <a:latin typeface="Aptos"/>
               </a:rPr>
-              <a:t> CFO roundtables planned, FY27</a:t>
+              <a:t>Greater customer value together</a:t>
             </a:r>
           </a:p>
         </p:txBody>
       </p:sp>
       <p:sp>
         <p:nvSpPr>
-          <p:cNvPr id="62" name="Oval 61"/>
+          <p:cNvPr id="43" name="Rounded Rectangle 42"/>
           <p:cNvSpPr/>
           <p:nvPr/>
         </p:nvSpPr>
         <p:spPr>
           <a:xfrm>
-            <a:off x="4590288" y="4791456"/>
-            <a:ext cx="82296" cy="82296"/>
-          </a:xfrm>
-          <a:prstGeom prst="ellipse">
-            <a:avLst/>
+            <a:off x="4604004" y="4297680"/>
+            <a:ext cx="2980944" cy="54864"/>
+          </a:xfrm>
+          <a:prstGeom prst="roundRect">
+            <a:avLst>
+              <a:gd name="adj" fmla="val 50000"/>
+            </a:avLst>
           </a:prstGeom>
           <a:solidFill>
             <a:srgbClr val="5F1EBE"/>
@@ -5121,69 +4144,18 @@
       </p:sp>
       <p:sp>
         <p:nvSpPr>
-          <p:cNvPr id="63" name="TextBox 62"/>
-          <p:cNvSpPr txBox="1"/>
-          <p:nvPr/>
-        </p:nvSpPr>
-        <p:spPr>
-          <a:xfrm>
-            <a:off x="4791456" y="4700016"/>
-            <a:ext cx="2825496" cy="347472"/>
-          </a:xfrm>
-          <a:prstGeom prst="rect">
-            <a:avLst/>
-          </a:prstGeom>
-          <a:noFill/>
-        </p:spPr>
-        <p:txBody>
-          <a:bodyPr wrap="square" lIns="0" rIns="0" tIns="0" bIns="0" anchor="t">
-            <a:spAutoFit/>
-          </a:bodyPr>
-          <a:lstStyle/>
-          <a:p>
-            <a:pPr algn="l">
-              <a:lnSpc>
-                <a:spcPct val="110000"/>
-              </a:lnSpc>
-              <a:spcAft>
-                <a:spcPts val="0"/>
-              </a:spcAft>
-            </a:pPr>
-            <a:r>
-              <a:rPr sz="1100" b="1">
-                <a:solidFill>
-                  <a:srgbClr val="5F1EBE"/>
-                </a:solidFill>
-                <a:latin typeface="Aptos"/>
-              </a:rPr>
-              <a:t>15+</a:t>
-            </a:r>
-            <a:r>
-              <a:rPr sz="950" b="0">
-                <a:solidFill>
-                  <a:srgbClr val="000000"/>
-                </a:solidFill>
-                <a:latin typeface="Aptos"/>
-              </a:rPr>
-              <a:t> analyst briefings planned, FY27</a:t>
-            </a:r>
-          </a:p>
-        </p:txBody>
-      </p:sp>
-      <p:sp>
-        <p:nvSpPr>
-          <p:cNvPr id="64" name="Rounded Rectangle 63"/>
+          <p:cNvPr id="44" name="Rounded Rectangle 43"/>
           <p:cNvSpPr/>
           <p:nvPr/>
         </p:nvSpPr>
         <p:spPr>
           <a:xfrm>
-            <a:off x="8074152" y="1426464"/>
-            <a:ext cx="3520440" cy="4663440"/>
+            <a:off x="8138160" y="1481328"/>
+            <a:ext cx="3456432" cy="2962656"/>
           </a:xfrm>
           <a:prstGeom prst="roundRect">
             <a:avLst>
-              <a:gd name="adj" fmla="val 2500"/>
+              <a:gd name="adj" fmla="val 3000"/>
             </a:avLst>
           </a:prstGeom>
           <a:solidFill>
@@ -5220,18 +4192,18 @@
       </p:sp>
       <p:sp>
         <p:nvSpPr>
-          <p:cNvPr id="65" name="Rounded Rectangle 64"/>
+          <p:cNvPr id="45" name="Rounded Rectangle 44"/>
           <p:cNvSpPr/>
           <p:nvPr/>
         </p:nvSpPr>
         <p:spPr>
           <a:xfrm>
-            <a:off x="8311896" y="1645920"/>
-            <a:ext cx="530352" cy="365760"/>
+            <a:off x="8375904" y="1700784"/>
+            <a:ext cx="475488" cy="402336"/>
           </a:xfrm>
           <a:prstGeom prst="roundRect">
             <a:avLst>
-              <a:gd name="adj" fmla="val 18000"/>
+              <a:gd name="adj" fmla="val 20000"/>
             </a:avLst>
           </a:prstGeom>
           <a:solidFill>
@@ -5257,12 +4229,12 @@
           </a:fontRef>
         </p:style>
         <p:txBody>
-          <a:bodyPr rtlCol="0" anchor="ctr" wrap="square" lIns="45720" rIns="45720" tIns="0" bIns="0"/>
+          <a:bodyPr rtlCol="0" anchor="ctr" wrap="square" lIns="73152" rIns="73152" tIns="0" bIns="0"/>
           <a:lstStyle/>
           <a:p>
             <a:pPr algn="ctr">
               <a:lnSpc>
-                <a:spcPct val="95000"/>
+                <a:spcPct val="98000"/>
               </a:lnSpc>
               <a:spcAft>
                 <a:spcPts val="0"/>
@@ -5282,14 +4254,14 @@
       </p:sp>
       <p:sp>
         <p:nvSpPr>
-          <p:cNvPr id="66" name="TextBox 65"/>
+          <p:cNvPr id="46" name="TextBox 45"/>
           <p:cNvSpPr txBox="1"/>
           <p:nvPr/>
         </p:nvSpPr>
         <p:spPr>
           <a:xfrm>
-            <a:off x="8951976" y="1591056"/>
-            <a:ext cx="2404872" cy="475488"/>
+            <a:off x="8979408" y="1682496"/>
+            <a:ext cx="2377439" cy="219456"/>
           </a:xfrm>
           <a:prstGeom prst="rect">
             <a:avLst/>
@@ -5303,54 +4275,159 @@
           <a:lstStyle/>
           <a:p>
             <a:pPr algn="l">
-              <a:lnSpc>
-                <a:spcPct val="95000"/>
-              </a:lnSpc>
               <a:spcAft>
                 <a:spcPts val="0"/>
               </a:spcAft>
             </a:pPr>
             <a:r>
-              <a:rPr sz="1500" b="1">
+              <a:rPr sz="1250" b="1">
                 <a:solidFill>
                   <a:srgbClr val="0F5FDC"/>
                 </a:solidFill>
                 <a:latin typeface="Aptos"/>
               </a:rPr>
-              <a:t>Co-created by the</a:t>
+              <a:t>ECOSYSTEM INNOVATION</a:t>
             </a:r>
           </a:p>
+        </p:txBody>
+      </p:sp>
+      <p:sp>
+        <p:nvSpPr>
+          <p:cNvPr id="47" name="TextBox 46"/>
+          <p:cNvSpPr txBox="1"/>
+          <p:nvPr/>
+        </p:nvSpPr>
+        <p:spPr>
+          <a:xfrm>
+            <a:off x="8979408" y="1938528"/>
+            <a:ext cx="2377439" cy="219456"/>
+          </a:xfrm>
+          <a:prstGeom prst="rect">
+            <a:avLst/>
+          </a:prstGeom>
+          <a:noFill/>
+        </p:spPr>
+        <p:txBody>
+          <a:bodyPr wrap="square" lIns="0" rIns="0" tIns="0" bIns="0" anchor="t">
+            <a:spAutoFit/>
+          </a:bodyPr>
+          <a:lstStyle/>
           <a:p>
             <a:pPr algn="l">
-              <a:lnSpc>
-                <a:spcPct val="95000"/>
-              </a:lnSpc>
               <a:spcAft>
                 <a:spcPts val="0"/>
               </a:spcAft>
             </a:pPr>
             <a:r>
-              <a:rPr sz="1500" b="1">
+              <a:rPr sz="1200" b="0">
                 <a:solidFill>
-                  <a:srgbClr val="0F5FDC"/>
+                  <a:srgbClr val="000000"/>
                 </a:solidFill>
                 <a:latin typeface="Aptos"/>
               </a:rPr>
-              <a:t>Partner ecosystem</a:t>
+              <a:t>Scale the reach</a:t>
             </a:r>
           </a:p>
         </p:txBody>
       </p:sp>
       <p:sp>
         <p:nvSpPr>
-          <p:cNvPr id="67" name="TextBox 66"/>
+          <p:cNvPr id="48" name="Oval 47"/>
+          <p:cNvSpPr/>
+          <p:nvPr/>
+        </p:nvSpPr>
+        <p:spPr>
+          <a:xfrm>
+            <a:off x="8705088" y="2432304"/>
+            <a:ext cx="402336" cy="402336"/>
+          </a:xfrm>
+          <a:prstGeom prst="ellipse">
+            <a:avLst/>
+          </a:prstGeom>
+          <a:solidFill>
+            <a:srgbClr val="E6EBF5"/>
+          </a:solidFill>
+          <a:ln>
+            <a:noFill/>
+          </a:ln>
+          <a:effectLst/>
+        </p:spPr>
+        <p:style>
+          <a:lnRef idx="1">
+            <a:schemeClr val="accent1"/>
+          </a:lnRef>
+          <a:fillRef idx="3">
+            <a:schemeClr val="accent1"/>
+          </a:fillRef>
+          <a:effectRef idx="2">
+            <a:schemeClr val="accent1"/>
+          </a:effectRef>
+          <a:fontRef idx="minor">
+            <a:schemeClr val="lt1"/>
+          </a:fontRef>
+        </p:style>
+        <p:txBody>
+          <a:bodyPr rtlCol="0" anchor="ctr" wrap="square"/>
+          <a:lstStyle/>
+          <a:p>
+            <a:pPr algn="ctr"/>
+          </a:p>
+        </p:txBody>
+      </p:sp>
+      <p:sp>
+        <p:nvSpPr>
+          <p:cNvPr id="49" name="Cloud 48"/>
+          <p:cNvSpPr/>
+          <p:nvPr/>
+        </p:nvSpPr>
+        <p:spPr>
+          <a:xfrm>
+            <a:off x="8807500" y="2561051"/>
+            <a:ext cx="197510" cy="144840"/>
+          </a:xfrm>
+          <a:prstGeom prst="cloud">
+            <a:avLst/>
+          </a:prstGeom>
+          <a:noFill/>
+          <a:ln w="12700">
+            <a:solidFill>
+              <a:srgbClr val="0F5FDC"/>
+            </a:solidFill>
+          </a:ln>
+          <a:effectLst/>
+        </p:spPr>
+        <p:style>
+          <a:lnRef idx="1">
+            <a:schemeClr val="accent1"/>
+          </a:lnRef>
+          <a:fillRef idx="3">
+            <a:schemeClr val="accent1"/>
+          </a:fillRef>
+          <a:effectRef idx="2">
+            <a:schemeClr val="accent1"/>
+          </a:effectRef>
+          <a:fontRef idx="minor">
+            <a:schemeClr val="lt1"/>
+          </a:fontRef>
+        </p:style>
+        <p:txBody>
+          <a:bodyPr rtlCol="0" anchor="ctr" wrap="square"/>
+          <a:lstStyle/>
+          <a:p>
+            <a:pPr algn="ctr"/>
+          </a:p>
+        </p:txBody>
+      </p:sp>
+      <p:sp>
+        <p:nvSpPr>
+          <p:cNvPr id="50" name="TextBox 49"/>
           <p:cNvSpPr txBox="1"/>
           <p:nvPr/>
         </p:nvSpPr>
         <p:spPr>
           <a:xfrm>
-            <a:off x="8311896" y="2157984"/>
-            <a:ext cx="3044952" cy="384048"/>
+            <a:off x="9253728" y="2395728"/>
+            <a:ext cx="2103120" cy="475488"/>
           </a:xfrm>
           <a:prstGeom prst="rect">
             <a:avLst/>
@@ -5358,7 +4435,7 @@
           <a:noFill/>
         </p:spPr>
         <p:txBody>
-          <a:bodyPr wrap="square" lIns="0" rIns="0" tIns="0" bIns="0" anchor="t">
+          <a:bodyPr wrap="square" lIns="0" rIns="0" tIns="0" bIns="0" anchor="ctr">
             <a:spAutoFit/>
           </a:bodyPr>
           <a:lstStyle/>
@@ -5372,30 +4449,77 @@
               </a:spcAft>
             </a:pPr>
             <a:r>
-              <a:rPr sz="1050" b="0">
+              <a:rPr sz="1000" b="0">
                 <a:solidFill>
-                  <a:srgbClr val="8291A0"/>
+                  <a:srgbClr val="000000"/>
                 </a:solidFill>
                 <a:latin typeface="Aptos"/>
               </a:rPr>
-              <a:t>Leverage hyperscalers and partners to build, innovate and scale together.</a:t>
+              <a:t>Hyperscalers</a:t>
             </a:r>
           </a:p>
         </p:txBody>
       </p:sp>
       <p:sp>
         <p:nvSpPr>
-          <p:cNvPr id="68" name="Oval 67"/>
+          <p:cNvPr id="51" name="Oval 50"/>
           <p:cNvSpPr/>
           <p:nvPr/>
         </p:nvSpPr>
         <p:spPr>
           <a:xfrm>
-            <a:off x="9468612" y="2843784"/>
-            <a:ext cx="731520" cy="731520"/>
+            <a:off x="8705088" y="3072384"/>
+            <a:ext cx="402336" cy="402336"/>
           </a:xfrm>
           <a:prstGeom prst="ellipse">
             <a:avLst/>
+          </a:prstGeom>
+          <a:solidFill>
+            <a:srgbClr val="E6EBF5"/>
+          </a:solidFill>
+          <a:ln>
+            <a:noFill/>
+          </a:ln>
+          <a:effectLst/>
+        </p:spPr>
+        <p:style>
+          <a:lnRef idx="1">
+            <a:schemeClr val="accent1"/>
+          </a:lnRef>
+          <a:fillRef idx="3">
+            <a:schemeClr val="accent1"/>
+          </a:fillRef>
+          <a:effectRef idx="2">
+            <a:schemeClr val="accent1"/>
+          </a:effectRef>
+          <a:fontRef idx="minor">
+            <a:schemeClr val="lt1"/>
+          </a:fontRef>
+        </p:style>
+        <p:txBody>
+          <a:bodyPr rtlCol="0" anchor="ctr" wrap="square"/>
+          <a:lstStyle/>
+          <a:p>
+            <a:pPr algn="ctr"/>
+          </a:p>
+        </p:txBody>
+      </p:sp>
+      <p:sp>
+        <p:nvSpPr>
+          <p:cNvPr id="52" name="Up Arrow 51"/>
+          <p:cNvSpPr/>
+          <p:nvPr/>
+        </p:nvSpPr>
+        <p:spPr>
+          <a:xfrm>
+            <a:off x="8825057" y="3192353"/>
+            <a:ext cx="162397" cy="162397"/>
+          </a:xfrm>
+          <a:prstGeom prst="upArrow">
+            <a:avLst>
+              <a:gd name="adj1" fmla="val 42000"/>
+              <a:gd name="adj2" fmla="val 42000"/>
+            </a:avLst>
           </a:prstGeom>
           <a:solidFill>
             <a:srgbClr val="0F5FDC"/>
@@ -5429,22 +4553,62 @@
       </p:sp>
       <p:sp>
         <p:nvSpPr>
-          <p:cNvPr id="69" name="Rounded Rectangle 68"/>
+          <p:cNvPr id="53" name="TextBox 52"/>
+          <p:cNvSpPr txBox="1"/>
+          <p:nvPr/>
+        </p:nvSpPr>
+        <p:spPr>
+          <a:xfrm>
+            <a:off x="9253728" y="3035808"/>
+            <a:ext cx="2103120" cy="475488"/>
+          </a:xfrm>
+          <a:prstGeom prst="rect">
+            <a:avLst/>
+          </a:prstGeom>
+          <a:noFill/>
+        </p:spPr>
+        <p:txBody>
+          <a:bodyPr wrap="square" lIns="0" rIns="0" tIns="0" bIns="0" anchor="ctr">
+            <a:spAutoFit/>
+          </a:bodyPr>
+          <a:lstStyle/>
+          <a:p>
+            <a:pPr algn="l">
+              <a:lnSpc>
+                <a:spcPct val="110000"/>
+              </a:lnSpc>
+              <a:spcAft>
+                <a:spcPts val="0"/>
+              </a:spcAft>
+            </a:pPr>
+            <a:r>
+              <a:rPr sz="1000" b="0">
+                <a:solidFill>
+                  <a:srgbClr val="000000"/>
+                </a:solidFill>
+                <a:latin typeface="Aptos"/>
+              </a:rPr>
+              <a:t>Startup plays — Krisp.ai, Stutt.ai</a:t>
+            </a:r>
+          </a:p>
+        </p:txBody>
+      </p:sp>
+      <p:sp>
+        <p:nvSpPr>
+          <p:cNvPr id="54" name="Oval 53"/>
           <p:cNvSpPr/>
           <p:nvPr/>
         </p:nvSpPr>
         <p:spPr>
           <a:xfrm>
-            <a:off x="9801453" y="3087745"/>
-            <a:ext cx="65836" cy="65836"/>
-          </a:xfrm>
-          <a:prstGeom prst="roundRect">
-            <a:avLst>
-              <a:gd name="adj" fmla="val 25000"/>
-            </a:avLst>
+            <a:off x="8705088" y="3712463"/>
+            <a:ext cx="402336" cy="402336"/>
+          </a:xfrm>
+          <a:prstGeom prst="ellipse">
+            <a:avLst/>
           </a:prstGeom>
           <a:solidFill>
-            <a:srgbClr val="FFFFFF"/>
+            <a:srgbClr val="E6EBF5"/>
           </a:solidFill>
           <a:ln>
             <a:noFill/>
@@ -5475,14 +4639,14 @@
       </p:sp>
       <p:sp>
         <p:nvSpPr>
-          <p:cNvPr id="70" name="Rounded Rectangle 69"/>
+          <p:cNvPr id="55" name="Rounded Rectangle 54"/>
           <p:cNvSpPr/>
           <p:nvPr/>
         </p:nvSpPr>
         <p:spPr>
           <a:xfrm>
-            <a:off x="9729033" y="3255629"/>
-            <a:ext cx="52669" cy="52669"/>
+            <a:off x="8884310" y="3832433"/>
+            <a:ext cx="43891" cy="43891"/>
           </a:xfrm>
           <a:prstGeom prst="roundRect">
             <a:avLst>
@@ -5490,7 +4654,7 @@
             </a:avLst>
           </a:prstGeom>
           <a:solidFill>
-            <a:srgbClr val="FFFFFF"/>
+            <a:srgbClr val="0F5FDC"/>
           </a:solidFill>
           <a:ln>
             <a:noFill/>
@@ -5521,14 +4685,14 @@
       </p:sp>
       <p:sp>
         <p:nvSpPr>
-          <p:cNvPr id="71" name="Rounded Rectangle 70"/>
+          <p:cNvPr id="56" name="Rounded Rectangle 55"/>
           <p:cNvSpPr/>
           <p:nvPr/>
         </p:nvSpPr>
         <p:spPr>
           <a:xfrm>
-            <a:off x="9808037" y="3255629"/>
-            <a:ext cx="52669" cy="52669"/>
+            <a:off x="8836030" y="3944355"/>
+            <a:ext cx="35112" cy="35112"/>
           </a:xfrm>
           <a:prstGeom prst="roundRect">
             <a:avLst>
@@ -5536,7 +4700,7 @@
             </a:avLst>
           </a:prstGeom>
           <a:solidFill>
-            <a:srgbClr val="FFFFFF"/>
+            <a:srgbClr val="0F5FDC"/>
           </a:solidFill>
           <a:ln>
             <a:noFill/>
@@ -5567,14 +4731,14 @@
       </p:sp>
       <p:sp>
         <p:nvSpPr>
-          <p:cNvPr id="72" name="Rounded Rectangle 71"/>
+          <p:cNvPr id="57" name="Rounded Rectangle 56"/>
           <p:cNvSpPr/>
           <p:nvPr/>
         </p:nvSpPr>
         <p:spPr>
           <a:xfrm>
-            <a:off x="9887041" y="3255629"/>
-            <a:ext cx="52669" cy="52669"/>
+            <a:off x="8888699" y="3944355"/>
+            <a:ext cx="35112" cy="35112"/>
           </a:xfrm>
           <a:prstGeom prst="roundRect">
             <a:avLst>
@@ -5582,7 +4746,7 @@
             </a:avLst>
           </a:prstGeom>
           <a:solidFill>
-            <a:srgbClr val="FFFFFF"/>
+            <a:srgbClr val="0F5FDC"/>
           </a:solidFill>
           <a:ln>
             <a:noFill/>
@@ -5613,14 +4777,60 @@
       </p:sp>
       <p:sp>
         <p:nvSpPr>
-          <p:cNvPr id="73" name="Freeform 72"/>
+          <p:cNvPr id="58" name="Rounded Rectangle 57"/>
           <p:cNvSpPr/>
           <p:nvPr/>
         </p:nvSpPr>
         <p:spPr>
           <a:xfrm>
-            <a:off x="9755367" y="3222711"/>
-            <a:ext cx="158009" cy="0"/>
+            <a:off x="8941368" y="3944355"/>
+            <a:ext cx="35112" cy="35112"/>
+          </a:xfrm>
+          <a:prstGeom prst="roundRect">
+            <a:avLst>
+              <a:gd name="adj" fmla="val 25000"/>
+            </a:avLst>
+          </a:prstGeom>
+          <a:solidFill>
+            <a:srgbClr val="0F5FDC"/>
+          </a:solidFill>
+          <a:ln>
+            <a:noFill/>
+          </a:ln>
+          <a:effectLst/>
+        </p:spPr>
+        <p:style>
+          <a:lnRef idx="1">
+            <a:schemeClr val="accent1"/>
+          </a:lnRef>
+          <a:fillRef idx="3">
+            <a:schemeClr val="accent1"/>
+          </a:fillRef>
+          <a:effectRef idx="2">
+            <a:schemeClr val="accent1"/>
+          </a:effectRef>
+          <a:fontRef idx="minor">
+            <a:schemeClr val="lt1"/>
+          </a:fontRef>
+        </p:style>
+        <p:txBody>
+          <a:bodyPr rtlCol="0" anchor="ctr" wrap="square"/>
+          <a:lstStyle/>
+          <a:p>
+            <a:pPr algn="ctr"/>
+          </a:p>
+        </p:txBody>
+      </p:sp>
+      <p:sp>
+        <p:nvSpPr>
+          <p:cNvPr id="59" name="Freeform 58"/>
+          <p:cNvSpPr/>
+          <p:nvPr/>
+        </p:nvSpPr>
+        <p:spPr>
+          <a:xfrm>
+            <a:off x="8853586" y="3922410"/>
+            <a:ext cx="105339" cy="0"/>
           </a:xfrm>
           <a:custGeom>
             <a:avLst/>
@@ -5629,12 +4839,1659 @@
             <a:cxnLst/>
             <a:rect l="l" t="t" r="r" b="b"/>
             <a:pathLst>
-              <a:path w="158009" h="0">
+              <a:path w="105339" h="0">
                 <a:moveTo>
                   <a:pt x="0" y="0"/>
                 </a:moveTo>
                 <a:lnTo>
-                  <a:pt x="158009" y="0"/>
+                  <a:pt x="105339" y="0"/>
+                </a:lnTo>
+              </a:path>
+            </a:pathLst>
+          </a:custGeom>
+          <a:noFill/>
+          <a:ln w="10795">
+            <a:solidFill>
+              <a:srgbClr val="0F5FDC"/>
+            </a:solidFill>
+          </a:ln>
+          <a:effectLst/>
+        </p:spPr>
+        <p:style>
+          <a:lnRef idx="1">
+            <a:schemeClr val="accent1"/>
+          </a:lnRef>
+          <a:fillRef idx="3">
+            <a:schemeClr val="accent1"/>
+          </a:fillRef>
+          <a:effectRef idx="2">
+            <a:schemeClr val="accent1"/>
+          </a:effectRef>
+          <a:fontRef idx="minor">
+            <a:schemeClr val="lt1"/>
+          </a:fontRef>
+        </p:style>
+        <p:txBody>
+          <a:bodyPr rtlCol="0" anchor="ctr"/>
+          <a:lstStyle/>
+          <a:p>
+            <a:pPr algn="ctr"/>
+          </a:p>
+        </p:txBody>
+      </p:sp>
+      <p:sp>
+        <p:nvSpPr>
+          <p:cNvPr id="60" name="TextBox 59"/>
+          <p:cNvSpPr txBox="1"/>
+          <p:nvPr/>
+        </p:nvSpPr>
+        <p:spPr>
+          <a:xfrm>
+            <a:off x="9253728" y="3675887"/>
+            <a:ext cx="2103120" cy="475488"/>
+          </a:xfrm>
+          <a:prstGeom prst="rect">
+            <a:avLst/>
+          </a:prstGeom>
+          <a:noFill/>
+        </p:spPr>
+        <p:txBody>
+          <a:bodyPr wrap="square" lIns="0" rIns="0" tIns="0" bIns="0" anchor="ctr">
+            <a:spAutoFit/>
+          </a:bodyPr>
+          <a:lstStyle/>
+          <a:p>
+            <a:pPr algn="l">
+              <a:lnSpc>
+                <a:spcPct val="110000"/>
+              </a:lnSpc>
+              <a:spcAft>
+                <a:spcPts val="0"/>
+              </a:spcAft>
+            </a:pPr>
+            <a:r>
+              <a:rPr sz="1000" b="0">
+                <a:solidFill>
+                  <a:srgbClr val="000000"/>
+                </a:solidFill>
+                <a:latin typeface="Aptos"/>
+              </a:rPr>
+              <a:t>Joint GTM initiatives</a:t>
+            </a:r>
+          </a:p>
+        </p:txBody>
+      </p:sp>
+      <p:sp>
+        <p:nvSpPr>
+          <p:cNvPr id="61" name="Rounded Rectangle 60"/>
+          <p:cNvSpPr/>
+          <p:nvPr/>
+        </p:nvSpPr>
+        <p:spPr>
+          <a:xfrm>
+            <a:off x="8375904" y="4297680"/>
+            <a:ext cx="2980944" cy="54864"/>
+          </a:xfrm>
+          <a:prstGeom prst="roundRect">
+            <a:avLst>
+              <a:gd name="adj" fmla="val 50000"/>
+            </a:avLst>
+          </a:prstGeom>
+          <a:solidFill>
+            <a:srgbClr val="0F5FDC"/>
+          </a:solidFill>
+          <a:ln>
+            <a:noFill/>
+          </a:ln>
+          <a:effectLst/>
+        </p:spPr>
+        <p:style>
+          <a:lnRef idx="1">
+            <a:schemeClr val="accent1"/>
+          </a:lnRef>
+          <a:fillRef idx="3">
+            <a:schemeClr val="accent1"/>
+          </a:fillRef>
+          <a:effectRef idx="2">
+            <a:schemeClr val="accent1"/>
+          </a:effectRef>
+          <a:fontRef idx="minor">
+            <a:schemeClr val="lt1"/>
+          </a:fontRef>
+        </p:style>
+        <p:txBody>
+          <a:bodyPr rtlCol="0" anchor="ctr" wrap="square"/>
+          <a:lstStyle/>
+          <a:p>
+            <a:pPr algn="ctr"/>
+          </a:p>
+        </p:txBody>
+      </p:sp>
+      <p:sp>
+        <p:nvSpPr>
+          <p:cNvPr id="62" name="Isosceles Triangle 61"/>
+          <p:cNvSpPr/>
+          <p:nvPr/>
+        </p:nvSpPr>
+        <p:spPr>
+          <a:xfrm rot="5400000">
+            <a:off x="4114800" y="2852928"/>
+            <a:ext cx="182880" cy="237744"/>
+          </a:xfrm>
+          <a:prstGeom prst="triangle">
+            <a:avLst/>
+          </a:prstGeom>
+          <a:solidFill>
+            <a:srgbClr val="C8D2DD"/>
+          </a:solidFill>
+          <a:ln>
+            <a:noFill/>
+          </a:ln>
+          <a:effectLst/>
+        </p:spPr>
+        <p:style>
+          <a:lnRef idx="1">
+            <a:schemeClr val="accent1"/>
+          </a:lnRef>
+          <a:fillRef idx="3">
+            <a:schemeClr val="accent1"/>
+          </a:fillRef>
+          <a:effectRef idx="2">
+            <a:schemeClr val="accent1"/>
+          </a:effectRef>
+          <a:fontRef idx="minor">
+            <a:schemeClr val="lt1"/>
+          </a:fontRef>
+        </p:style>
+        <p:txBody>
+          <a:bodyPr rtlCol="0" anchor="ctr" wrap="square"/>
+          <a:lstStyle/>
+          <a:p>
+            <a:pPr algn="ctr"/>
+          </a:p>
+        </p:txBody>
+      </p:sp>
+      <p:sp>
+        <p:nvSpPr>
+          <p:cNvPr id="63" name="Isosceles Triangle 62"/>
+          <p:cNvSpPr/>
+          <p:nvPr/>
+        </p:nvSpPr>
+        <p:spPr>
+          <a:xfrm rot="5400000">
+            <a:off x="7886700" y="2852928"/>
+            <a:ext cx="182880" cy="237744"/>
+          </a:xfrm>
+          <a:prstGeom prst="triangle">
+            <a:avLst/>
+          </a:prstGeom>
+          <a:solidFill>
+            <a:srgbClr val="C8D2DD"/>
+          </a:solidFill>
+          <a:ln>
+            <a:noFill/>
+          </a:ln>
+          <a:effectLst/>
+        </p:spPr>
+        <p:style>
+          <a:lnRef idx="1">
+            <a:schemeClr val="accent1"/>
+          </a:lnRef>
+          <a:fillRef idx="3">
+            <a:schemeClr val="accent1"/>
+          </a:fillRef>
+          <a:effectRef idx="2">
+            <a:schemeClr val="accent1"/>
+          </a:effectRef>
+          <a:fontRef idx="minor">
+            <a:schemeClr val="lt1"/>
+          </a:fontRef>
+        </p:style>
+        <p:txBody>
+          <a:bodyPr rtlCol="0" anchor="ctr" wrap="square"/>
+          <a:lstStyle/>
+          <a:p>
+            <a:pPr algn="ctr"/>
+          </a:p>
+        </p:txBody>
+      </p:sp>
+      <p:sp>
+        <p:nvSpPr>
+          <p:cNvPr id="64" name="Rounded Rectangle 63"/>
+          <p:cNvSpPr/>
+          <p:nvPr/>
+        </p:nvSpPr>
+        <p:spPr>
+          <a:xfrm>
+            <a:off x="594360" y="4590288"/>
+            <a:ext cx="11000232" cy="749808"/>
+          </a:xfrm>
+          <a:prstGeom prst="roundRect">
+            <a:avLst>
+              <a:gd name="adj" fmla="val 16000"/>
+            </a:avLst>
+          </a:prstGeom>
+          <a:solidFill>
+            <a:srgbClr val="DCE6F0"/>
+          </a:solidFill>
+          <a:ln>
+            <a:noFill/>
+          </a:ln>
+          <a:effectLst/>
+        </p:spPr>
+        <p:style>
+          <a:lnRef idx="1">
+            <a:schemeClr val="accent1"/>
+          </a:lnRef>
+          <a:fillRef idx="3">
+            <a:schemeClr val="accent1"/>
+          </a:fillRef>
+          <a:effectRef idx="2">
+            <a:schemeClr val="accent1"/>
+          </a:effectRef>
+          <a:fontRef idx="minor">
+            <a:schemeClr val="lt1"/>
+          </a:fontRef>
+        </p:style>
+        <p:txBody>
+          <a:bodyPr rtlCol="0" anchor="ctr" wrap="square"/>
+          <a:lstStyle/>
+          <a:p>
+            <a:pPr algn="ctr"/>
+          </a:p>
+        </p:txBody>
+      </p:sp>
+      <p:sp>
+        <p:nvSpPr>
+          <p:cNvPr id="65" name="Oval 64"/>
+          <p:cNvSpPr/>
+          <p:nvPr/>
+        </p:nvSpPr>
+        <p:spPr>
+          <a:xfrm>
+            <a:off x="3552444" y="4709159"/>
+            <a:ext cx="512064" cy="512064"/>
+          </a:xfrm>
+          <a:prstGeom prst="ellipse">
+            <a:avLst/>
+          </a:prstGeom>
+          <a:solidFill>
+            <a:srgbClr val="5F1EBE"/>
+          </a:solidFill>
+          <a:ln>
+            <a:noFill/>
+          </a:ln>
+          <a:effectLst/>
+        </p:spPr>
+        <p:style>
+          <a:lnRef idx="1">
+            <a:schemeClr val="accent1"/>
+          </a:lnRef>
+          <a:fillRef idx="3">
+            <a:schemeClr val="accent1"/>
+          </a:fillRef>
+          <a:effectRef idx="2">
+            <a:schemeClr val="accent1"/>
+          </a:effectRef>
+          <a:fontRef idx="minor">
+            <a:schemeClr val="lt1"/>
+          </a:fontRef>
+        </p:style>
+        <p:txBody>
+          <a:bodyPr rtlCol="0" anchor="ctr" wrap="square"/>
+          <a:lstStyle/>
+          <a:p>
+            <a:pPr algn="ctr"/>
+          </a:p>
+        </p:txBody>
+      </p:sp>
+      <p:sp>
+        <p:nvSpPr>
+          <p:cNvPr id="66" name="5-Point Star 65"/>
+          <p:cNvSpPr/>
+          <p:nvPr/>
+        </p:nvSpPr>
+        <p:spPr>
+          <a:xfrm>
+            <a:off x="3690518" y="4847234"/>
+            <a:ext cx="235915" cy="235915"/>
+          </a:xfrm>
+          <a:prstGeom prst="star5">
+            <a:avLst/>
+          </a:prstGeom>
+          <a:solidFill>
+            <a:srgbClr val="FFFFFF"/>
+          </a:solidFill>
+          <a:ln>
+            <a:noFill/>
+          </a:ln>
+          <a:effectLst/>
+        </p:spPr>
+        <p:style>
+          <a:lnRef idx="1">
+            <a:schemeClr val="accent1"/>
+          </a:lnRef>
+          <a:fillRef idx="3">
+            <a:schemeClr val="accent1"/>
+          </a:fillRef>
+          <a:effectRef idx="2">
+            <a:schemeClr val="accent1"/>
+          </a:effectRef>
+          <a:fontRef idx="minor">
+            <a:schemeClr val="lt1"/>
+          </a:fontRef>
+        </p:style>
+        <p:txBody>
+          <a:bodyPr rtlCol="0" anchor="ctr" wrap="square"/>
+          <a:lstStyle/>
+          <a:p>
+            <a:pPr algn="ctr"/>
+          </a:p>
+        </p:txBody>
+      </p:sp>
+      <p:sp>
+        <p:nvSpPr>
+          <p:cNvPr id="67" name="Freeform 66"/>
+          <p:cNvSpPr/>
+          <p:nvPr/>
+        </p:nvSpPr>
+        <p:spPr>
+          <a:xfrm>
+            <a:off x="4338828" y="4754879"/>
+            <a:ext cx="0" cy="420624"/>
+          </a:xfrm>
+          <a:custGeom>
+            <a:avLst/>
+            <a:gdLst/>
+            <a:ahLst/>
+            <a:cxnLst/>
+            <a:rect l="l" t="t" r="r" b="b"/>
+            <a:pathLst>
+              <a:path w="0" h="420624">
+                <a:moveTo>
+                  <a:pt x="0" y="0"/>
+                </a:moveTo>
+                <a:lnTo>
+                  <a:pt x="0" y="420624"/>
+                </a:lnTo>
+              </a:path>
+            </a:pathLst>
+          </a:custGeom>
+          <a:noFill/>
+          <a:ln w="9525">
+            <a:solidFill>
+              <a:srgbClr val="C8D2DD"/>
+            </a:solidFill>
+          </a:ln>
+          <a:effectLst/>
+        </p:spPr>
+        <p:style>
+          <a:lnRef idx="1">
+            <a:schemeClr val="accent1"/>
+          </a:lnRef>
+          <a:fillRef idx="3">
+            <a:schemeClr val="accent1"/>
+          </a:fillRef>
+          <a:effectRef idx="2">
+            <a:schemeClr val="accent1"/>
+          </a:effectRef>
+          <a:fontRef idx="minor">
+            <a:schemeClr val="lt1"/>
+          </a:fontRef>
+        </p:style>
+        <p:txBody>
+          <a:bodyPr rtlCol="0" anchor="ctr"/>
+          <a:lstStyle/>
+          <a:p>
+            <a:pPr algn="ctr"/>
+          </a:p>
+        </p:txBody>
+      </p:sp>
+      <p:sp>
+        <p:nvSpPr>
+          <p:cNvPr id="68" name="TextBox 67"/>
+          <p:cNvSpPr txBox="1"/>
+          <p:nvPr/>
+        </p:nvSpPr>
+        <p:spPr>
+          <a:xfrm>
+            <a:off x="4558283" y="4590288"/>
+            <a:ext cx="4069080" cy="749808"/>
+          </a:xfrm>
+          <a:prstGeom prst="rect">
+            <a:avLst/>
+          </a:prstGeom>
+          <a:noFill/>
+        </p:spPr>
+        <p:txBody>
+          <a:bodyPr wrap="square" lIns="0" rIns="0" tIns="0" bIns="0" anchor="ctr">
+            <a:spAutoFit/>
+          </a:bodyPr>
+          <a:lstStyle/>
+          <a:p>
+            <a:pPr algn="l">
+              <a:spcAft>
+                <a:spcPts val="200"/>
+              </a:spcAft>
+            </a:pPr>
+            <a:r>
+              <a:rPr sz="1500" b="1">
+                <a:solidFill>
+                  <a:srgbClr val="411482"/>
+                </a:solidFill>
+                <a:latin typeface="Aptos"/>
+              </a:rPr>
+              <a:t>1st DPO ADVISOR DAY COMPLETED</a:t>
+            </a:r>
+          </a:p>
+          <a:p>
+            <a:pPr algn="l">
+              <a:spcAft>
+                <a:spcPts val="200"/>
+              </a:spcAft>
+            </a:pPr>
+            <a:r>
+              <a:rPr sz="1100" b="0">
+                <a:solidFill>
+                  <a:srgbClr val="8291A0"/>
+                </a:solidFill>
+                <a:latin typeface="Aptos"/>
+              </a:rPr>
+              <a:t>A strong start to our platform-led GTM motion</a:t>
+            </a:r>
+          </a:p>
+        </p:txBody>
+      </p:sp>
+      <p:sp>
+        <p:nvSpPr>
+          <p:cNvPr id="69" name="Rounded Rectangle 68"/>
+          <p:cNvSpPr/>
+          <p:nvPr/>
+        </p:nvSpPr>
+        <p:spPr>
+          <a:xfrm>
+            <a:off x="594360" y="5486400"/>
+            <a:ext cx="2578608" cy="896112"/>
+          </a:xfrm>
+          <a:prstGeom prst="roundRect">
+            <a:avLst>
+              <a:gd name="adj" fmla="val 8000"/>
+            </a:avLst>
+          </a:prstGeom>
+          <a:solidFill>
+            <a:srgbClr val="FFFFFF"/>
+          </a:solidFill>
+          <a:ln w="9525">
+            <a:solidFill>
+              <a:srgbClr val="C8D2DD"/>
+            </a:solidFill>
+          </a:ln>
+          <a:effectLst/>
+        </p:spPr>
+        <p:style>
+          <a:lnRef idx="1">
+            <a:schemeClr val="accent1"/>
+          </a:lnRef>
+          <a:fillRef idx="3">
+            <a:schemeClr val="accent1"/>
+          </a:fillRef>
+          <a:effectRef idx="2">
+            <a:schemeClr val="accent1"/>
+          </a:effectRef>
+          <a:fontRef idx="minor">
+            <a:schemeClr val="lt1"/>
+          </a:fontRef>
+        </p:style>
+        <p:txBody>
+          <a:bodyPr rtlCol="0" anchor="ctr" wrap="square"/>
+          <a:lstStyle/>
+          <a:p>
+            <a:pPr algn="ctr"/>
+          </a:p>
+        </p:txBody>
+      </p:sp>
+      <p:sp>
+        <p:nvSpPr>
+          <p:cNvPr id="70" name="Oval 69"/>
+          <p:cNvSpPr/>
+          <p:nvPr/>
+        </p:nvSpPr>
+        <p:spPr>
+          <a:xfrm>
+            <a:off x="758952" y="5696712"/>
+            <a:ext cx="475488" cy="475488"/>
+          </a:xfrm>
+          <a:prstGeom prst="ellipse">
+            <a:avLst/>
+          </a:prstGeom>
+          <a:solidFill>
+            <a:srgbClr val="5F1EBE"/>
+          </a:solidFill>
+          <a:ln>
+            <a:noFill/>
+          </a:ln>
+          <a:effectLst/>
+        </p:spPr>
+        <p:style>
+          <a:lnRef idx="1">
+            <a:schemeClr val="accent1"/>
+          </a:lnRef>
+          <a:fillRef idx="3">
+            <a:schemeClr val="accent1"/>
+          </a:fillRef>
+          <a:effectRef idx="2">
+            <a:schemeClr val="accent1"/>
+          </a:effectRef>
+          <a:fontRef idx="minor">
+            <a:schemeClr val="lt1"/>
+          </a:fontRef>
+        </p:style>
+        <p:txBody>
+          <a:bodyPr rtlCol="0" anchor="ctr" wrap="square"/>
+          <a:lstStyle/>
+          <a:p>
+            <a:pPr algn="ctr"/>
+          </a:p>
+        </p:txBody>
+      </p:sp>
+      <p:sp>
+        <p:nvSpPr>
+          <p:cNvPr id="71" name="Rounded Rectangle 70"/>
+          <p:cNvSpPr/>
+          <p:nvPr/>
+        </p:nvSpPr>
+        <p:spPr>
+          <a:xfrm>
+            <a:off x="907084" y="5926775"/>
+            <a:ext cx="46085" cy="87050"/>
+          </a:xfrm>
+          <a:prstGeom prst="roundRect">
+            <a:avLst>
+              <a:gd name="adj" fmla="val 30000"/>
+            </a:avLst>
+          </a:prstGeom>
+          <a:solidFill>
+            <a:srgbClr val="FFFFFF"/>
+          </a:solidFill>
+          <a:ln>
+            <a:noFill/>
+          </a:ln>
+          <a:effectLst/>
+        </p:spPr>
+        <p:style>
+          <a:lnRef idx="1">
+            <a:schemeClr val="accent1"/>
+          </a:lnRef>
+          <a:fillRef idx="3">
+            <a:schemeClr val="accent1"/>
+          </a:fillRef>
+          <a:effectRef idx="2">
+            <a:schemeClr val="accent1"/>
+          </a:effectRef>
+          <a:fontRef idx="minor">
+            <a:schemeClr val="lt1"/>
+          </a:fontRef>
+        </p:style>
+        <p:txBody>
+          <a:bodyPr rtlCol="0" anchor="ctr" wrap="square"/>
+          <a:lstStyle/>
+          <a:p>
+            <a:pPr algn="ctr"/>
+          </a:p>
+        </p:txBody>
+      </p:sp>
+      <p:sp>
+        <p:nvSpPr>
+          <p:cNvPr id="72" name="Rounded Rectangle 71"/>
+          <p:cNvSpPr/>
+          <p:nvPr/>
+        </p:nvSpPr>
+        <p:spPr>
+          <a:xfrm>
+            <a:off x="976213" y="5865327"/>
+            <a:ext cx="46085" cy="148498"/>
+          </a:xfrm>
+          <a:prstGeom prst="roundRect">
+            <a:avLst>
+              <a:gd name="adj" fmla="val 30000"/>
+            </a:avLst>
+          </a:prstGeom>
+          <a:solidFill>
+            <a:srgbClr val="FFFFFF"/>
+          </a:solidFill>
+          <a:ln>
+            <a:noFill/>
+          </a:ln>
+          <a:effectLst/>
+        </p:spPr>
+        <p:style>
+          <a:lnRef idx="1">
+            <a:schemeClr val="accent1"/>
+          </a:lnRef>
+          <a:fillRef idx="3">
+            <a:schemeClr val="accent1"/>
+          </a:fillRef>
+          <a:effectRef idx="2">
+            <a:schemeClr val="accent1"/>
+          </a:effectRef>
+          <a:fontRef idx="minor">
+            <a:schemeClr val="lt1"/>
+          </a:fontRef>
+        </p:style>
+        <p:txBody>
+          <a:bodyPr rtlCol="0" anchor="ctr" wrap="square"/>
+          <a:lstStyle/>
+          <a:p>
+            <a:pPr algn="ctr"/>
+          </a:p>
+        </p:txBody>
+      </p:sp>
+      <p:sp>
+        <p:nvSpPr>
+          <p:cNvPr id="73" name="Rounded Rectangle 72"/>
+          <p:cNvSpPr/>
+          <p:nvPr/>
+        </p:nvSpPr>
+        <p:spPr>
+          <a:xfrm>
+            <a:off x="1045342" y="5798759"/>
+            <a:ext cx="46085" cy="215066"/>
+          </a:xfrm>
+          <a:prstGeom prst="roundRect">
+            <a:avLst>
+              <a:gd name="adj" fmla="val 30000"/>
+            </a:avLst>
+          </a:prstGeom>
+          <a:solidFill>
+            <a:srgbClr val="FFFFFF"/>
+          </a:solidFill>
+          <a:ln>
+            <a:noFill/>
+          </a:ln>
+          <a:effectLst/>
+        </p:spPr>
+        <p:style>
+          <a:lnRef idx="1">
+            <a:schemeClr val="accent1"/>
+          </a:lnRef>
+          <a:fillRef idx="3">
+            <a:schemeClr val="accent1"/>
+          </a:fillRef>
+          <a:effectRef idx="2">
+            <a:schemeClr val="accent1"/>
+          </a:effectRef>
+          <a:fontRef idx="minor">
+            <a:schemeClr val="lt1"/>
+          </a:fontRef>
+        </p:style>
+        <p:txBody>
+          <a:bodyPr rtlCol="0" anchor="ctr" wrap="square"/>
+          <a:lstStyle/>
+          <a:p>
+            <a:pPr algn="ctr"/>
+          </a:p>
+        </p:txBody>
+      </p:sp>
+      <p:sp>
+        <p:nvSpPr>
+          <p:cNvPr id="74" name="TextBox 73"/>
+          <p:cNvSpPr txBox="1"/>
+          <p:nvPr/>
+        </p:nvSpPr>
+        <p:spPr>
+          <a:xfrm>
+            <a:off x="1362456" y="5577840"/>
+            <a:ext cx="1664207" cy="347472"/>
+          </a:xfrm>
+          <a:prstGeom prst="rect">
+            <a:avLst/>
+          </a:prstGeom>
+          <a:noFill/>
+        </p:spPr>
+        <p:txBody>
+          <a:bodyPr wrap="square" lIns="0" rIns="0" tIns="0" bIns="0" anchor="ctr">
+            <a:spAutoFit/>
+          </a:bodyPr>
+          <a:lstStyle/>
+          <a:p>
+            <a:pPr algn="l">
+              <a:spcAft>
+                <a:spcPts val="0"/>
+              </a:spcAft>
+            </a:pPr>
+            <a:r>
+              <a:rPr sz="2100" b="1">
+                <a:solidFill>
+                  <a:srgbClr val="5F1EBE"/>
+                </a:solidFill>
+                <a:latin typeface="Aptos"/>
+              </a:rPr>
+              <a:t>89%</a:t>
+            </a:r>
+          </a:p>
+        </p:txBody>
+      </p:sp>
+      <p:sp>
+        <p:nvSpPr>
+          <p:cNvPr id="75" name="TextBox 74"/>
+          <p:cNvSpPr txBox="1"/>
+          <p:nvPr/>
+        </p:nvSpPr>
+        <p:spPr>
+          <a:xfrm>
+            <a:off x="1362456" y="5943600"/>
+            <a:ext cx="1664207" cy="365760"/>
+          </a:xfrm>
+          <a:prstGeom prst="rect">
+            <a:avLst/>
+          </a:prstGeom>
+          <a:noFill/>
+        </p:spPr>
+        <p:txBody>
+          <a:bodyPr wrap="square" lIns="0" rIns="0" tIns="0" bIns="0" anchor="t">
+            <a:spAutoFit/>
+          </a:bodyPr>
+          <a:lstStyle/>
+          <a:p>
+            <a:pPr algn="l">
+              <a:lnSpc>
+                <a:spcPct val="105000"/>
+              </a:lnSpc>
+              <a:spcAft>
+                <a:spcPts val="0"/>
+              </a:spcAft>
+            </a:pPr>
+            <a:r>
+              <a:rPr sz="950" b="0">
+                <a:solidFill>
+                  <a:srgbClr val="000000"/>
+                </a:solidFill>
+                <a:latin typeface="Aptos"/>
+              </a:rPr>
+              <a:t>Willing to take DPO</a:t>
+            </a:r>
+          </a:p>
+          <a:p>
+            <a:pPr algn="l">
+              <a:lnSpc>
+                <a:spcPct val="105000"/>
+              </a:lnSpc>
+              <a:spcAft>
+                <a:spcPts val="0"/>
+              </a:spcAft>
+            </a:pPr>
+            <a:r>
+              <a:rPr sz="950" b="0">
+                <a:solidFill>
+                  <a:srgbClr val="000000"/>
+                </a:solidFill>
+                <a:latin typeface="Aptos"/>
+              </a:rPr>
+              <a:t>platform to market</a:t>
+            </a:r>
+          </a:p>
+        </p:txBody>
+      </p:sp>
+      <p:sp>
+        <p:nvSpPr>
+          <p:cNvPr id="76" name="Rounded Rectangle 75"/>
+          <p:cNvSpPr/>
+          <p:nvPr/>
+        </p:nvSpPr>
+        <p:spPr>
+          <a:xfrm>
+            <a:off x="3401568" y="5486400"/>
+            <a:ext cx="2578608" cy="896112"/>
+          </a:xfrm>
+          <a:prstGeom prst="roundRect">
+            <a:avLst>
+              <a:gd name="adj" fmla="val 8000"/>
+            </a:avLst>
+          </a:prstGeom>
+          <a:solidFill>
+            <a:srgbClr val="FFFFFF"/>
+          </a:solidFill>
+          <a:ln w="9525">
+            <a:solidFill>
+              <a:srgbClr val="C8D2DD"/>
+            </a:solidFill>
+          </a:ln>
+          <a:effectLst/>
+        </p:spPr>
+        <p:style>
+          <a:lnRef idx="1">
+            <a:schemeClr val="accent1"/>
+          </a:lnRef>
+          <a:fillRef idx="3">
+            <a:schemeClr val="accent1"/>
+          </a:fillRef>
+          <a:effectRef idx="2">
+            <a:schemeClr val="accent1"/>
+          </a:effectRef>
+          <a:fontRef idx="minor">
+            <a:schemeClr val="lt1"/>
+          </a:fontRef>
+        </p:style>
+        <p:txBody>
+          <a:bodyPr rtlCol="0" anchor="ctr" wrap="square"/>
+          <a:lstStyle/>
+          <a:p>
+            <a:pPr algn="ctr"/>
+          </a:p>
+        </p:txBody>
+      </p:sp>
+      <p:sp>
+        <p:nvSpPr>
+          <p:cNvPr id="77" name="Oval 76"/>
+          <p:cNvSpPr/>
+          <p:nvPr/>
+        </p:nvSpPr>
+        <p:spPr>
+          <a:xfrm>
+            <a:off x="3566160" y="5696712"/>
+            <a:ext cx="475488" cy="475488"/>
+          </a:xfrm>
+          <a:prstGeom prst="ellipse">
+            <a:avLst/>
+          </a:prstGeom>
+          <a:solidFill>
+            <a:srgbClr val="5F1EBE"/>
+          </a:solidFill>
+          <a:ln>
+            <a:noFill/>
+          </a:ln>
+          <a:effectLst/>
+        </p:spPr>
+        <p:style>
+          <a:lnRef idx="1">
+            <a:schemeClr val="accent1"/>
+          </a:lnRef>
+          <a:fillRef idx="3">
+            <a:schemeClr val="accent1"/>
+          </a:fillRef>
+          <a:effectRef idx="2">
+            <a:schemeClr val="accent1"/>
+          </a:effectRef>
+          <a:fontRef idx="minor">
+            <a:schemeClr val="lt1"/>
+          </a:fontRef>
+        </p:style>
+        <p:txBody>
+          <a:bodyPr rtlCol="0" anchor="ctr" wrap="square"/>
+          <a:lstStyle/>
+          <a:p>
+            <a:pPr algn="ctr"/>
+          </a:p>
+        </p:txBody>
+      </p:sp>
+      <p:sp>
+        <p:nvSpPr>
+          <p:cNvPr id="78" name="Oval 77"/>
+          <p:cNvSpPr/>
+          <p:nvPr/>
+        </p:nvSpPr>
+        <p:spPr>
+          <a:xfrm>
+            <a:off x="3747576" y="5839724"/>
+            <a:ext cx="76809" cy="76809"/>
+          </a:xfrm>
+          <a:prstGeom prst="ellipse">
+            <a:avLst/>
+          </a:prstGeom>
+          <a:noFill/>
+          <a:ln w="12700">
+            <a:solidFill>
+              <a:srgbClr val="FFFFFF"/>
+            </a:solidFill>
+          </a:ln>
+          <a:effectLst/>
+        </p:spPr>
+        <p:style>
+          <a:lnRef idx="1">
+            <a:schemeClr val="accent1"/>
+          </a:lnRef>
+          <a:fillRef idx="3">
+            <a:schemeClr val="accent1"/>
+          </a:fillRef>
+          <a:effectRef idx="2">
+            <a:schemeClr val="accent1"/>
+          </a:effectRef>
+          <a:fontRef idx="minor">
+            <a:schemeClr val="lt1"/>
+          </a:fontRef>
+        </p:style>
+        <p:txBody>
+          <a:bodyPr rtlCol="0" anchor="ctr" wrap="square"/>
+          <a:lstStyle/>
+          <a:p>
+            <a:pPr algn="ctr"/>
+          </a:p>
+        </p:txBody>
+      </p:sp>
+      <p:sp>
+        <p:nvSpPr>
+          <p:cNvPr id="79" name="Round Same Side Corner Rectangle 78"/>
+          <p:cNvSpPr/>
+          <p:nvPr/>
+        </p:nvSpPr>
+        <p:spPr>
+          <a:xfrm>
+            <a:off x="3734775" y="5919094"/>
+            <a:ext cx="102412" cy="112654"/>
+          </a:xfrm>
+          <a:prstGeom prst="round2SameRect">
+            <a:avLst>
+              <a:gd name="adj1" fmla="val 45000"/>
+              <a:gd name="adj2" fmla="val 0"/>
+            </a:avLst>
+          </a:prstGeom>
+          <a:noFill/>
+          <a:ln w="12700">
+            <a:solidFill>
+              <a:srgbClr val="FFFFFF"/>
+            </a:solidFill>
+          </a:ln>
+          <a:effectLst/>
+        </p:spPr>
+        <p:style>
+          <a:lnRef idx="1">
+            <a:schemeClr val="accent1"/>
+          </a:lnRef>
+          <a:fillRef idx="3">
+            <a:schemeClr val="accent1"/>
+          </a:fillRef>
+          <a:effectRef idx="2">
+            <a:schemeClr val="accent1"/>
+          </a:effectRef>
+          <a:fontRef idx="minor">
+            <a:schemeClr val="lt1"/>
+          </a:fontRef>
+        </p:style>
+        <p:txBody>
+          <a:bodyPr rtlCol="0" anchor="ctr" wrap="square"/>
+          <a:lstStyle/>
+          <a:p>
+            <a:pPr algn="ctr"/>
+          </a:p>
+        </p:txBody>
+      </p:sp>
+      <p:sp>
+        <p:nvSpPr>
+          <p:cNvPr id="80" name="Oval 79"/>
+          <p:cNvSpPr/>
+          <p:nvPr/>
+        </p:nvSpPr>
+        <p:spPr>
+          <a:xfrm>
+            <a:off x="3816705" y="5839724"/>
+            <a:ext cx="76809" cy="76809"/>
+          </a:xfrm>
+          <a:prstGeom prst="ellipse">
+            <a:avLst/>
+          </a:prstGeom>
+          <a:noFill/>
+          <a:ln w="12700">
+            <a:solidFill>
+              <a:srgbClr val="FFFFFF"/>
+            </a:solidFill>
+          </a:ln>
+          <a:effectLst/>
+        </p:spPr>
+        <p:style>
+          <a:lnRef idx="1">
+            <a:schemeClr val="accent1"/>
+          </a:lnRef>
+          <a:fillRef idx="3">
+            <a:schemeClr val="accent1"/>
+          </a:fillRef>
+          <a:effectRef idx="2">
+            <a:schemeClr val="accent1"/>
+          </a:effectRef>
+          <a:fontRef idx="minor">
+            <a:schemeClr val="lt1"/>
+          </a:fontRef>
+        </p:style>
+        <p:txBody>
+          <a:bodyPr rtlCol="0" anchor="ctr" wrap="square"/>
+          <a:lstStyle/>
+          <a:p>
+            <a:pPr algn="ctr"/>
+          </a:p>
+        </p:txBody>
+      </p:sp>
+      <p:sp>
+        <p:nvSpPr>
+          <p:cNvPr id="81" name="Round Same Side Corner Rectangle 80"/>
+          <p:cNvSpPr/>
+          <p:nvPr/>
+        </p:nvSpPr>
+        <p:spPr>
+          <a:xfrm>
+            <a:off x="3803904" y="5919094"/>
+            <a:ext cx="102412" cy="112654"/>
+          </a:xfrm>
+          <a:prstGeom prst="round2SameRect">
+            <a:avLst>
+              <a:gd name="adj1" fmla="val 45000"/>
+              <a:gd name="adj2" fmla="val 0"/>
+            </a:avLst>
+          </a:prstGeom>
+          <a:noFill/>
+          <a:ln w="12700">
+            <a:solidFill>
+              <a:srgbClr val="FFFFFF"/>
+            </a:solidFill>
+          </a:ln>
+          <a:effectLst/>
+        </p:spPr>
+        <p:style>
+          <a:lnRef idx="1">
+            <a:schemeClr val="accent1"/>
+          </a:lnRef>
+          <a:fillRef idx="3">
+            <a:schemeClr val="accent1"/>
+          </a:fillRef>
+          <a:effectRef idx="2">
+            <a:schemeClr val="accent1"/>
+          </a:effectRef>
+          <a:fontRef idx="minor">
+            <a:schemeClr val="lt1"/>
+          </a:fontRef>
+        </p:style>
+        <p:txBody>
+          <a:bodyPr rtlCol="0" anchor="ctr" wrap="square"/>
+          <a:lstStyle/>
+          <a:p>
+            <a:pPr algn="ctr"/>
+          </a:p>
+        </p:txBody>
+      </p:sp>
+      <p:sp>
+        <p:nvSpPr>
+          <p:cNvPr id="82" name="TextBox 81"/>
+          <p:cNvSpPr txBox="1"/>
+          <p:nvPr/>
+        </p:nvSpPr>
+        <p:spPr>
+          <a:xfrm>
+            <a:off x="4169663" y="5577840"/>
+            <a:ext cx="1664207" cy="347472"/>
+          </a:xfrm>
+          <a:prstGeom prst="rect">
+            <a:avLst/>
+          </a:prstGeom>
+          <a:noFill/>
+        </p:spPr>
+        <p:txBody>
+          <a:bodyPr wrap="square" lIns="0" rIns="0" tIns="0" bIns="0" anchor="ctr">
+            <a:spAutoFit/>
+          </a:bodyPr>
+          <a:lstStyle/>
+          <a:p>
+            <a:pPr algn="l">
+              <a:spcAft>
+                <a:spcPts val="0"/>
+              </a:spcAft>
+            </a:pPr>
+            <a:r>
+              <a:rPr sz="2100" b="1">
+                <a:solidFill>
+                  <a:srgbClr val="5F1EBE"/>
+                </a:solidFill>
+                <a:latin typeface="Aptos"/>
+              </a:rPr>
+              <a:t>20+</a:t>
+            </a:r>
+          </a:p>
+        </p:txBody>
+      </p:sp>
+      <p:sp>
+        <p:nvSpPr>
+          <p:cNvPr id="83" name="TextBox 82"/>
+          <p:cNvSpPr txBox="1"/>
+          <p:nvPr/>
+        </p:nvSpPr>
+        <p:spPr>
+          <a:xfrm>
+            <a:off x="4169663" y="5943600"/>
+            <a:ext cx="1664207" cy="365760"/>
+          </a:xfrm>
+          <a:prstGeom prst="rect">
+            <a:avLst/>
+          </a:prstGeom>
+          <a:noFill/>
+        </p:spPr>
+        <p:txBody>
+          <a:bodyPr wrap="square" lIns="0" rIns="0" tIns="0" bIns="0" anchor="t">
+            <a:spAutoFit/>
+          </a:bodyPr>
+          <a:lstStyle/>
+          <a:p>
+            <a:pPr algn="l">
+              <a:lnSpc>
+                <a:spcPct val="105000"/>
+              </a:lnSpc>
+              <a:spcAft>
+                <a:spcPts val="0"/>
+              </a:spcAft>
+            </a:pPr>
+            <a:r>
+              <a:rPr sz="950" b="0">
+                <a:solidFill>
+                  <a:srgbClr val="000000"/>
+                </a:solidFill>
+                <a:latin typeface="Aptos"/>
+              </a:rPr>
+              <a:t>Sales enablement</a:t>
+            </a:r>
+          </a:p>
+          <a:p>
+            <a:pPr algn="l">
+              <a:lnSpc>
+                <a:spcPct val="105000"/>
+              </a:lnSpc>
+              <a:spcAft>
+                <a:spcPts val="0"/>
+              </a:spcAft>
+            </a:pPr>
+            <a:r>
+              <a:rPr sz="950" b="0">
+                <a:solidFill>
+                  <a:srgbClr val="000000"/>
+                </a:solidFill>
+                <a:latin typeface="Aptos"/>
+              </a:rPr>
+              <a:t>sessions</a:t>
+            </a:r>
+          </a:p>
+        </p:txBody>
+      </p:sp>
+      <p:sp>
+        <p:nvSpPr>
+          <p:cNvPr id="84" name="Rounded Rectangle 83"/>
+          <p:cNvSpPr/>
+          <p:nvPr/>
+        </p:nvSpPr>
+        <p:spPr>
+          <a:xfrm>
+            <a:off x="6208776" y="5486400"/>
+            <a:ext cx="2578608" cy="896112"/>
+          </a:xfrm>
+          <a:prstGeom prst="roundRect">
+            <a:avLst>
+              <a:gd name="adj" fmla="val 8000"/>
+            </a:avLst>
+          </a:prstGeom>
+          <a:solidFill>
+            <a:srgbClr val="FFFFFF"/>
+          </a:solidFill>
+          <a:ln w="9525">
+            <a:solidFill>
+              <a:srgbClr val="C8D2DD"/>
+            </a:solidFill>
+          </a:ln>
+          <a:effectLst/>
+        </p:spPr>
+        <p:style>
+          <a:lnRef idx="1">
+            <a:schemeClr val="accent1"/>
+          </a:lnRef>
+          <a:fillRef idx="3">
+            <a:schemeClr val="accent1"/>
+          </a:fillRef>
+          <a:effectRef idx="2">
+            <a:schemeClr val="accent1"/>
+          </a:effectRef>
+          <a:fontRef idx="minor">
+            <a:schemeClr val="lt1"/>
+          </a:fontRef>
+        </p:style>
+        <p:txBody>
+          <a:bodyPr rtlCol="0" anchor="ctr" wrap="square"/>
+          <a:lstStyle/>
+          <a:p>
+            <a:pPr algn="ctr"/>
+          </a:p>
+        </p:txBody>
+      </p:sp>
+      <p:sp>
+        <p:nvSpPr>
+          <p:cNvPr id="85" name="Oval 84"/>
+          <p:cNvSpPr/>
+          <p:nvPr/>
+        </p:nvSpPr>
+        <p:spPr>
+          <a:xfrm>
+            <a:off x="6373368" y="5696712"/>
+            <a:ext cx="475488" cy="475488"/>
+          </a:xfrm>
+          <a:prstGeom prst="ellipse">
+            <a:avLst/>
+          </a:prstGeom>
+          <a:solidFill>
+            <a:srgbClr val="5F1EBE"/>
+          </a:solidFill>
+          <a:ln>
+            <a:noFill/>
+          </a:ln>
+          <a:effectLst/>
+        </p:spPr>
+        <p:style>
+          <a:lnRef idx="1">
+            <a:schemeClr val="accent1"/>
+          </a:lnRef>
+          <a:fillRef idx="3">
+            <a:schemeClr val="accent1"/>
+          </a:fillRef>
+          <a:effectRef idx="2">
+            <a:schemeClr val="accent1"/>
+          </a:effectRef>
+          <a:fontRef idx="minor">
+            <a:schemeClr val="lt1"/>
+          </a:fontRef>
+        </p:style>
+        <p:txBody>
+          <a:bodyPr rtlCol="0" anchor="ctr" wrap="square"/>
+          <a:lstStyle/>
+          <a:p>
+            <a:pPr algn="ctr"/>
+          </a:p>
+        </p:txBody>
+      </p:sp>
+      <p:sp>
+        <p:nvSpPr>
+          <p:cNvPr id="86" name="Oval 85"/>
+          <p:cNvSpPr/>
+          <p:nvPr/>
+        </p:nvSpPr>
+        <p:spPr>
+          <a:xfrm>
+            <a:off x="6483096" y="5806440"/>
+            <a:ext cx="256032" cy="256032"/>
+          </a:xfrm>
+          <a:prstGeom prst="ellipse">
+            <a:avLst/>
+          </a:prstGeom>
+          <a:noFill/>
+          <a:ln w="12700">
+            <a:solidFill>
+              <a:srgbClr val="FFFFFF"/>
+            </a:solidFill>
+          </a:ln>
+          <a:effectLst/>
+        </p:spPr>
+        <p:style>
+          <a:lnRef idx="1">
+            <a:schemeClr val="accent1"/>
+          </a:lnRef>
+          <a:fillRef idx="3">
+            <a:schemeClr val="accent1"/>
+          </a:fillRef>
+          <a:effectRef idx="2">
+            <a:schemeClr val="accent1"/>
+          </a:effectRef>
+          <a:fontRef idx="minor">
+            <a:schemeClr val="lt1"/>
+          </a:fontRef>
+        </p:style>
+        <p:txBody>
+          <a:bodyPr rtlCol="0" anchor="ctr" wrap="square"/>
+          <a:lstStyle/>
+          <a:p>
+            <a:pPr algn="ctr"/>
+          </a:p>
+        </p:txBody>
+      </p:sp>
+      <p:sp>
+        <p:nvSpPr>
+          <p:cNvPr id="87" name="Oval 86"/>
+          <p:cNvSpPr/>
+          <p:nvPr/>
+        </p:nvSpPr>
+        <p:spPr>
+          <a:xfrm>
+            <a:off x="6540703" y="5864047"/>
+            <a:ext cx="140817" cy="140817"/>
+          </a:xfrm>
+          <a:prstGeom prst="ellipse">
+            <a:avLst/>
+          </a:prstGeom>
+          <a:noFill/>
+          <a:ln w="12700">
+            <a:solidFill>
+              <a:srgbClr val="FFFFFF"/>
+            </a:solidFill>
+          </a:ln>
+          <a:effectLst/>
+        </p:spPr>
+        <p:style>
+          <a:lnRef idx="1">
+            <a:schemeClr val="accent1"/>
+          </a:lnRef>
+          <a:fillRef idx="3">
+            <a:schemeClr val="accent1"/>
+          </a:fillRef>
+          <a:effectRef idx="2">
+            <a:schemeClr val="accent1"/>
+          </a:effectRef>
+          <a:fontRef idx="minor">
+            <a:schemeClr val="lt1"/>
+          </a:fontRef>
+        </p:style>
+        <p:txBody>
+          <a:bodyPr rtlCol="0" anchor="ctr" wrap="square"/>
+          <a:lstStyle/>
+          <a:p>
+            <a:pPr algn="ctr"/>
+          </a:p>
+        </p:txBody>
+      </p:sp>
+      <p:sp>
+        <p:nvSpPr>
+          <p:cNvPr id="88" name="Oval 87"/>
+          <p:cNvSpPr/>
+          <p:nvPr/>
+        </p:nvSpPr>
+        <p:spPr>
+          <a:xfrm>
+            <a:off x="6588069" y="5911413"/>
+            <a:ext cx="46085" cy="46085"/>
+          </a:xfrm>
+          <a:prstGeom prst="ellipse">
+            <a:avLst/>
+          </a:prstGeom>
+          <a:solidFill>
+            <a:srgbClr val="FFFFFF"/>
+          </a:solidFill>
+          <a:ln>
+            <a:noFill/>
+          </a:ln>
+          <a:effectLst/>
+        </p:spPr>
+        <p:style>
+          <a:lnRef idx="1">
+            <a:schemeClr val="accent1"/>
+          </a:lnRef>
+          <a:fillRef idx="3">
+            <a:schemeClr val="accent1"/>
+          </a:fillRef>
+          <a:effectRef idx="2">
+            <a:schemeClr val="accent1"/>
+          </a:effectRef>
+          <a:fontRef idx="minor">
+            <a:schemeClr val="lt1"/>
+          </a:fontRef>
+        </p:style>
+        <p:txBody>
+          <a:bodyPr rtlCol="0" anchor="ctr" wrap="square"/>
+          <a:lstStyle/>
+          <a:p>
+            <a:pPr algn="ctr"/>
+          </a:p>
+        </p:txBody>
+      </p:sp>
+      <p:sp>
+        <p:nvSpPr>
+          <p:cNvPr id="89" name="TextBox 88"/>
+          <p:cNvSpPr txBox="1"/>
+          <p:nvPr/>
+        </p:nvSpPr>
+        <p:spPr>
+          <a:xfrm>
+            <a:off x="6976872" y="5577840"/>
+            <a:ext cx="1664207" cy="347472"/>
+          </a:xfrm>
+          <a:prstGeom prst="rect">
+            <a:avLst/>
+          </a:prstGeom>
+          <a:noFill/>
+        </p:spPr>
+        <p:txBody>
+          <a:bodyPr wrap="square" lIns="0" rIns="0" tIns="0" bIns="0" anchor="ctr">
+            <a:spAutoFit/>
+          </a:bodyPr>
+          <a:lstStyle/>
+          <a:p>
+            <a:pPr algn="l">
+              <a:spcAft>
+                <a:spcPts val="0"/>
+              </a:spcAft>
+            </a:pPr>
+            <a:r>
+              <a:rPr sz="2100" b="1">
+                <a:solidFill>
+                  <a:srgbClr val="5F1EBE"/>
+                </a:solidFill>
+                <a:latin typeface="Aptos"/>
+              </a:rPr>
+              <a:t>5+</a:t>
+            </a:r>
+          </a:p>
+        </p:txBody>
+      </p:sp>
+      <p:sp>
+        <p:nvSpPr>
+          <p:cNvPr id="90" name="TextBox 89"/>
+          <p:cNvSpPr txBox="1"/>
+          <p:nvPr/>
+        </p:nvSpPr>
+        <p:spPr>
+          <a:xfrm>
+            <a:off x="6976872" y="5943600"/>
+            <a:ext cx="1664207" cy="365760"/>
+          </a:xfrm>
+          <a:prstGeom prst="rect">
+            <a:avLst/>
+          </a:prstGeom>
+          <a:noFill/>
+        </p:spPr>
+        <p:txBody>
+          <a:bodyPr wrap="square" lIns="0" rIns="0" tIns="0" bIns="0" anchor="t">
+            <a:spAutoFit/>
+          </a:bodyPr>
+          <a:lstStyle/>
+          <a:p>
+            <a:pPr algn="l">
+              <a:lnSpc>
+                <a:spcPct val="105000"/>
+              </a:lnSpc>
+              <a:spcAft>
+                <a:spcPts val="0"/>
+              </a:spcAft>
+            </a:pPr>
+            <a:r>
+              <a:rPr sz="950" b="0">
+                <a:solidFill>
+                  <a:srgbClr val="000000"/>
+                </a:solidFill>
+                <a:latin typeface="Aptos"/>
+              </a:rPr>
+              <a:t>CFO roundtables</a:t>
+            </a:r>
+          </a:p>
+          <a:p>
+            <a:pPr algn="l">
+              <a:lnSpc>
+                <a:spcPct val="105000"/>
+              </a:lnSpc>
+              <a:spcAft>
+                <a:spcPts val="0"/>
+              </a:spcAft>
+            </a:pPr>
+            <a:r>
+              <a:rPr sz="950" b="0">
+                <a:solidFill>
+                  <a:srgbClr val="000000"/>
+                </a:solidFill>
+                <a:latin typeface="Aptos"/>
+              </a:rPr>
+              <a:t>planned, FY27</a:t>
+            </a:r>
+          </a:p>
+        </p:txBody>
+      </p:sp>
+      <p:sp>
+        <p:nvSpPr>
+          <p:cNvPr id="91" name="Rounded Rectangle 90"/>
+          <p:cNvSpPr/>
+          <p:nvPr/>
+        </p:nvSpPr>
+        <p:spPr>
+          <a:xfrm>
+            <a:off x="9015984" y="5486400"/>
+            <a:ext cx="2578608" cy="896112"/>
+          </a:xfrm>
+          <a:prstGeom prst="roundRect">
+            <a:avLst>
+              <a:gd name="adj" fmla="val 8000"/>
+            </a:avLst>
+          </a:prstGeom>
+          <a:solidFill>
+            <a:srgbClr val="FFFFFF"/>
+          </a:solidFill>
+          <a:ln w="9525">
+            <a:solidFill>
+              <a:srgbClr val="C8D2DD"/>
+            </a:solidFill>
+          </a:ln>
+          <a:effectLst/>
+        </p:spPr>
+        <p:style>
+          <a:lnRef idx="1">
+            <a:schemeClr val="accent1"/>
+          </a:lnRef>
+          <a:fillRef idx="3">
+            <a:schemeClr val="accent1"/>
+          </a:fillRef>
+          <a:effectRef idx="2">
+            <a:schemeClr val="accent1"/>
+          </a:effectRef>
+          <a:fontRef idx="minor">
+            <a:schemeClr val="lt1"/>
+          </a:fontRef>
+        </p:style>
+        <p:txBody>
+          <a:bodyPr rtlCol="0" anchor="ctr" wrap="square"/>
+          <a:lstStyle/>
+          <a:p>
+            <a:pPr algn="ctr"/>
+          </a:p>
+        </p:txBody>
+      </p:sp>
+      <p:sp>
+        <p:nvSpPr>
+          <p:cNvPr id="92" name="Oval 91"/>
+          <p:cNvSpPr/>
+          <p:nvPr/>
+        </p:nvSpPr>
+        <p:spPr>
+          <a:xfrm>
+            <a:off x="9180576" y="5696712"/>
+            <a:ext cx="475488" cy="475488"/>
+          </a:xfrm>
+          <a:prstGeom prst="ellipse">
+            <a:avLst/>
+          </a:prstGeom>
+          <a:solidFill>
+            <a:srgbClr val="5F1EBE"/>
+          </a:solidFill>
+          <a:ln>
+            <a:noFill/>
+          </a:ln>
+          <a:effectLst/>
+        </p:spPr>
+        <p:style>
+          <a:lnRef idx="1">
+            <a:schemeClr val="accent1"/>
+          </a:lnRef>
+          <a:fillRef idx="3">
+            <a:schemeClr val="accent1"/>
+          </a:fillRef>
+          <a:effectRef idx="2">
+            <a:schemeClr val="accent1"/>
+          </a:effectRef>
+          <a:fontRef idx="minor">
+            <a:schemeClr val="lt1"/>
+          </a:fontRef>
+        </p:style>
+        <p:txBody>
+          <a:bodyPr rtlCol="0" anchor="ctr" wrap="square"/>
+          <a:lstStyle/>
+          <a:p>
+            <a:pPr algn="ctr"/>
+          </a:p>
+        </p:txBody>
+      </p:sp>
+      <p:sp>
+        <p:nvSpPr>
+          <p:cNvPr id="93" name="Rounded Rectangle 92"/>
+          <p:cNvSpPr/>
+          <p:nvPr/>
+        </p:nvSpPr>
+        <p:spPr>
+          <a:xfrm>
+            <a:off x="9338950" y="5824362"/>
+            <a:ext cx="158739" cy="220187"/>
+          </a:xfrm>
+          <a:prstGeom prst="roundRect">
+            <a:avLst>
+              <a:gd name="adj" fmla="val 12000"/>
+            </a:avLst>
+          </a:prstGeom>
+          <a:noFill/>
+          <a:ln w="12700">
+            <a:solidFill>
+              <a:srgbClr val="FFFFFF"/>
+            </a:solidFill>
+          </a:ln>
+          <a:effectLst/>
+        </p:spPr>
+        <p:style>
+          <a:lnRef idx="1">
+            <a:schemeClr val="accent1"/>
+          </a:lnRef>
+          <a:fillRef idx="3">
+            <a:schemeClr val="accent1"/>
+          </a:fillRef>
+          <a:effectRef idx="2">
+            <a:schemeClr val="accent1"/>
+          </a:effectRef>
+          <a:fontRef idx="minor">
+            <a:schemeClr val="lt1"/>
+          </a:fontRef>
+        </p:style>
+        <p:txBody>
+          <a:bodyPr rtlCol="0" anchor="ctr" wrap="square"/>
+          <a:lstStyle/>
+          <a:p>
+            <a:pPr algn="ctr"/>
+          </a:p>
+        </p:txBody>
+      </p:sp>
+      <p:sp>
+        <p:nvSpPr>
+          <p:cNvPr id="94" name="Freeform 93"/>
+          <p:cNvSpPr/>
+          <p:nvPr/>
+        </p:nvSpPr>
+        <p:spPr>
+          <a:xfrm>
+            <a:off x="9374794" y="5873008"/>
+            <a:ext cx="43525" cy="0"/>
+          </a:xfrm>
+          <a:custGeom>
+            <a:avLst/>
+            <a:gdLst/>
+            <a:ahLst/>
+            <a:cxnLst/>
+            <a:rect l="l" t="t" r="r" b="b"/>
+            <a:pathLst>
+              <a:path w="43525" h="0">
+                <a:moveTo>
+                  <a:pt x="0" y="0"/>
+                </a:moveTo>
+                <a:lnTo>
+                  <a:pt x="43525" y="0"/>
                 </a:lnTo>
               </a:path>
             </a:pathLst>
@@ -5671,14 +6528,14 @@
       </p:sp>
       <p:sp>
         <p:nvSpPr>
-          <p:cNvPr id="74" name="Freeform 73"/>
+          <p:cNvPr id="95" name="Freeform 94"/>
           <p:cNvSpPr/>
           <p:nvPr/>
         </p:nvSpPr>
         <p:spPr>
           <a:xfrm>
-            <a:off x="9340596" y="2843784"/>
-            <a:ext cx="182880" cy="201167"/>
+            <a:off x="9374794" y="5926775"/>
+            <a:ext cx="43525" cy="0"/>
           </a:xfrm>
           <a:custGeom>
             <a:avLst/>
@@ -5687,22 +6544,21 @@
             <a:cxnLst/>
             <a:rect l="l" t="t" r="r" b="b"/>
             <a:pathLst>
-              <a:path w="182880" h="201167">
+              <a:path w="43525" h="0">
                 <a:moveTo>
                   <a:pt x="0" y="0"/>
                 </a:moveTo>
                 <a:lnTo>
-                  <a:pt x="182880" y="201167"/>
+                  <a:pt x="43525" y="0"/>
                 </a:lnTo>
               </a:path>
             </a:pathLst>
           </a:custGeom>
           <a:noFill/>
-          <a:ln w="9525">
+          <a:ln w="10795">
             <a:solidFill>
-              <a:srgbClr val="C8D2DD"/>
+              <a:srgbClr val="FFFFFF"/>
             </a:solidFill>
-            <a:prstDash val="dash"/>
           </a:ln>
           <a:effectLst/>
         </p:spPr>
@@ -5730,76 +6586,14 @@
       </p:sp>
       <p:sp>
         <p:nvSpPr>
-          <p:cNvPr id="75" name="Rounded Rectangle 74"/>
+          <p:cNvPr id="96" name="Freeform 95"/>
           <p:cNvSpPr/>
           <p:nvPr/>
         </p:nvSpPr>
         <p:spPr>
           <a:xfrm>
-            <a:off x="8316468" y="2697479"/>
-            <a:ext cx="1024128" cy="292608"/>
-          </a:xfrm>
-          <a:prstGeom prst="roundRect">
-            <a:avLst>
-              <a:gd name="adj" fmla="val 50000"/>
-            </a:avLst>
-          </a:prstGeom>
-          <a:solidFill>
-            <a:srgbClr val="E6EBF5"/>
-          </a:solidFill>
-          <a:ln>
-            <a:noFill/>
-          </a:ln>
-          <a:effectLst/>
-        </p:spPr>
-        <p:style>
-          <a:lnRef idx="1">
-            <a:schemeClr val="accent1"/>
-          </a:lnRef>
-          <a:fillRef idx="3">
-            <a:schemeClr val="accent1"/>
-          </a:fillRef>
-          <a:effectRef idx="2">
-            <a:schemeClr val="accent1"/>
-          </a:effectRef>
-          <a:fontRef idx="minor">
-            <a:schemeClr val="lt1"/>
-          </a:fontRef>
-        </p:style>
-        <p:txBody>
-          <a:bodyPr rtlCol="0" anchor="ctr" wrap="square" lIns="45720" rIns="45720" tIns="0" bIns="0"/>
-          <a:lstStyle/>
-          <a:p>
-            <a:pPr algn="ctr">
-              <a:lnSpc>
-                <a:spcPct val="95000"/>
-              </a:lnSpc>
-              <a:spcAft>
-                <a:spcPts val="0"/>
-              </a:spcAft>
-            </a:pPr>
-            <a:r>
-              <a:rPr sz="850" b="1">
-                <a:solidFill>
-                  <a:srgbClr val="0F5FDC"/>
-                </a:solidFill>
-                <a:latin typeface="Aptos"/>
-              </a:rPr>
-              <a:t>Hyperscalers</a:t>
-            </a:r>
-          </a:p>
-        </p:txBody>
-      </p:sp>
-      <p:sp>
-        <p:nvSpPr>
-          <p:cNvPr id="76" name="Freeform 75"/>
-          <p:cNvSpPr/>
-          <p:nvPr/>
-        </p:nvSpPr>
-        <p:spPr>
-          <a:xfrm>
-            <a:off x="10145268" y="2843784"/>
-            <a:ext cx="182880" cy="201167"/>
+            <a:off x="9374794" y="5980541"/>
+            <a:ext cx="43525" cy="0"/>
           </a:xfrm>
           <a:custGeom>
             <a:avLst/>
@@ -5808,22 +6602,21 @@
             <a:cxnLst/>
             <a:rect l="l" t="t" r="r" b="b"/>
             <a:pathLst>
-              <a:path w="182880" h="201167">
+              <a:path w="43525" h="0">
                 <a:moveTo>
-                  <a:pt x="182880" y="0"/>
+                  <a:pt x="0" y="0"/>
                 </a:moveTo>
                 <a:lnTo>
-                  <a:pt x="0" y="201167"/>
+                  <a:pt x="43525" y="0"/>
                 </a:lnTo>
               </a:path>
             </a:pathLst>
           </a:custGeom>
           <a:noFill/>
-          <a:ln w="9525">
+          <a:ln w="10795">
             <a:solidFill>
-              <a:srgbClr val="C8D2DD"/>
+              <a:srgbClr val="FFFFFF"/>
             </a:solidFill>
-            <a:prstDash val="dash"/>
           </a:ln>
           <a:effectLst/>
         </p:spPr>
@@ -5851,376 +6644,14 @@
       </p:sp>
       <p:sp>
         <p:nvSpPr>
-          <p:cNvPr id="77" name="Rounded Rectangle 76"/>
-          <p:cNvSpPr/>
-          <p:nvPr/>
-        </p:nvSpPr>
-        <p:spPr>
-          <a:xfrm>
-            <a:off x="10328148" y="2697479"/>
-            <a:ext cx="1024128" cy="292608"/>
-          </a:xfrm>
-          <a:prstGeom prst="roundRect">
-            <a:avLst>
-              <a:gd name="adj" fmla="val 50000"/>
-            </a:avLst>
-          </a:prstGeom>
-          <a:solidFill>
-            <a:srgbClr val="E6EBF5"/>
-          </a:solidFill>
-          <a:ln>
-            <a:noFill/>
-          </a:ln>
-          <a:effectLst/>
-        </p:spPr>
-        <p:style>
-          <a:lnRef idx="1">
-            <a:schemeClr val="accent1"/>
-          </a:lnRef>
-          <a:fillRef idx="3">
-            <a:schemeClr val="accent1"/>
-          </a:fillRef>
-          <a:effectRef idx="2">
-            <a:schemeClr val="accent1"/>
-          </a:effectRef>
-          <a:fontRef idx="minor">
-            <a:schemeClr val="lt1"/>
-          </a:fontRef>
-        </p:style>
-        <p:txBody>
-          <a:bodyPr rtlCol="0" anchor="ctr" wrap="square" lIns="45720" rIns="45720" tIns="0" bIns="0"/>
-          <a:lstStyle/>
-          <a:p>
-            <a:pPr algn="ctr">
-              <a:lnSpc>
-                <a:spcPct val="95000"/>
-              </a:lnSpc>
-              <a:spcAft>
-                <a:spcPts val="0"/>
-              </a:spcAft>
-            </a:pPr>
-            <a:r>
-              <a:rPr sz="850" b="1">
-                <a:solidFill>
-                  <a:srgbClr val="0F5FDC"/>
-                </a:solidFill>
-                <a:latin typeface="Aptos"/>
-              </a:rPr>
-              <a:t>MS &amp; AWS</a:t>
-            </a:r>
-          </a:p>
-        </p:txBody>
-      </p:sp>
-      <p:sp>
-        <p:nvSpPr>
-          <p:cNvPr id="78" name="Freeform 77"/>
-          <p:cNvSpPr/>
-          <p:nvPr/>
-        </p:nvSpPr>
-        <p:spPr>
-          <a:xfrm>
-            <a:off x="9340596" y="3374136"/>
-            <a:ext cx="182880" cy="201167"/>
-          </a:xfrm>
-          <a:custGeom>
-            <a:avLst/>
-            <a:gdLst/>
-            <a:ahLst/>
-            <a:cxnLst/>
-            <a:rect l="l" t="t" r="r" b="b"/>
-            <a:pathLst>
-              <a:path w="182880" h="201167">
-                <a:moveTo>
-                  <a:pt x="0" y="201167"/>
-                </a:moveTo>
-                <a:lnTo>
-                  <a:pt x="182880" y="0"/>
-                </a:lnTo>
-              </a:path>
-            </a:pathLst>
-          </a:custGeom>
-          <a:noFill/>
-          <a:ln w="9525">
-            <a:solidFill>
-              <a:srgbClr val="C8D2DD"/>
-            </a:solidFill>
-            <a:prstDash val="dash"/>
-          </a:ln>
-          <a:effectLst/>
-        </p:spPr>
-        <p:style>
-          <a:lnRef idx="1">
-            <a:schemeClr val="accent1"/>
-          </a:lnRef>
-          <a:fillRef idx="3">
-            <a:schemeClr val="accent1"/>
-          </a:fillRef>
-          <a:effectRef idx="2">
-            <a:schemeClr val="accent1"/>
-          </a:effectRef>
-          <a:fontRef idx="minor">
-            <a:schemeClr val="lt1"/>
-          </a:fontRef>
-        </p:style>
-        <p:txBody>
-          <a:bodyPr rtlCol="0" anchor="ctr"/>
-          <a:lstStyle/>
-          <a:p>
-            <a:pPr algn="ctr"/>
-          </a:p>
-        </p:txBody>
-      </p:sp>
-      <p:sp>
-        <p:nvSpPr>
-          <p:cNvPr id="79" name="Rounded Rectangle 78"/>
-          <p:cNvSpPr/>
-          <p:nvPr/>
-        </p:nvSpPr>
-        <p:spPr>
-          <a:xfrm>
-            <a:off x="8316468" y="3428999"/>
-            <a:ext cx="1024128" cy="292608"/>
-          </a:xfrm>
-          <a:prstGeom prst="roundRect">
-            <a:avLst>
-              <a:gd name="adj" fmla="val 50000"/>
-            </a:avLst>
-          </a:prstGeom>
-          <a:solidFill>
-            <a:srgbClr val="E6EBF5"/>
-          </a:solidFill>
-          <a:ln>
-            <a:noFill/>
-          </a:ln>
-          <a:effectLst/>
-        </p:spPr>
-        <p:style>
-          <a:lnRef idx="1">
-            <a:schemeClr val="accent1"/>
-          </a:lnRef>
-          <a:fillRef idx="3">
-            <a:schemeClr val="accent1"/>
-          </a:fillRef>
-          <a:effectRef idx="2">
-            <a:schemeClr val="accent1"/>
-          </a:effectRef>
-          <a:fontRef idx="minor">
-            <a:schemeClr val="lt1"/>
-          </a:fontRef>
-        </p:style>
-        <p:txBody>
-          <a:bodyPr rtlCol="0" anchor="ctr" wrap="square" lIns="45720" rIns="45720" tIns="0" bIns="0"/>
-          <a:lstStyle/>
-          <a:p>
-            <a:pPr algn="ctr">
-              <a:lnSpc>
-                <a:spcPct val="95000"/>
-              </a:lnSpc>
-              <a:spcAft>
-                <a:spcPts val="0"/>
-              </a:spcAft>
-            </a:pPr>
-            <a:r>
-              <a:rPr sz="850" b="1">
-                <a:solidFill>
-                  <a:srgbClr val="0F5FDC"/>
-                </a:solidFill>
-                <a:latin typeface="Aptos"/>
-              </a:rPr>
-              <a:t>Startup Play</a:t>
-            </a:r>
-          </a:p>
-        </p:txBody>
-      </p:sp>
-      <p:sp>
-        <p:nvSpPr>
-          <p:cNvPr id="80" name="Freeform 79"/>
-          <p:cNvSpPr/>
-          <p:nvPr/>
-        </p:nvSpPr>
-        <p:spPr>
-          <a:xfrm>
-            <a:off x="10145268" y="3374136"/>
-            <a:ext cx="182880" cy="201167"/>
-          </a:xfrm>
-          <a:custGeom>
-            <a:avLst/>
-            <a:gdLst/>
-            <a:ahLst/>
-            <a:cxnLst/>
-            <a:rect l="l" t="t" r="r" b="b"/>
-            <a:pathLst>
-              <a:path w="182880" h="201167">
-                <a:moveTo>
-                  <a:pt x="182880" y="201167"/>
-                </a:moveTo>
-                <a:lnTo>
-                  <a:pt x="0" y="0"/>
-                </a:lnTo>
-              </a:path>
-            </a:pathLst>
-          </a:custGeom>
-          <a:noFill/>
-          <a:ln w="9525">
-            <a:solidFill>
-              <a:srgbClr val="C8D2DD"/>
-            </a:solidFill>
-            <a:prstDash val="dash"/>
-          </a:ln>
-          <a:effectLst/>
-        </p:spPr>
-        <p:style>
-          <a:lnRef idx="1">
-            <a:schemeClr val="accent1"/>
-          </a:lnRef>
-          <a:fillRef idx="3">
-            <a:schemeClr val="accent1"/>
-          </a:fillRef>
-          <a:effectRef idx="2">
-            <a:schemeClr val="accent1"/>
-          </a:effectRef>
-          <a:fontRef idx="minor">
-            <a:schemeClr val="lt1"/>
-          </a:fontRef>
-        </p:style>
-        <p:txBody>
-          <a:bodyPr rtlCol="0" anchor="ctr"/>
-          <a:lstStyle/>
-          <a:p>
-            <a:pPr algn="ctr"/>
-          </a:p>
-        </p:txBody>
-      </p:sp>
-      <p:sp>
-        <p:nvSpPr>
-          <p:cNvPr id="81" name="Rounded Rectangle 80"/>
-          <p:cNvSpPr/>
-          <p:nvPr/>
-        </p:nvSpPr>
-        <p:spPr>
-          <a:xfrm>
-            <a:off x="10328148" y="3428999"/>
-            <a:ext cx="1024128" cy="292608"/>
-          </a:xfrm>
-          <a:prstGeom prst="roundRect">
-            <a:avLst>
-              <a:gd name="adj" fmla="val 50000"/>
-            </a:avLst>
-          </a:prstGeom>
-          <a:solidFill>
-            <a:srgbClr val="E6EBF5"/>
-          </a:solidFill>
-          <a:ln>
-            <a:noFill/>
-          </a:ln>
-          <a:effectLst/>
-        </p:spPr>
-        <p:style>
-          <a:lnRef idx="1">
-            <a:schemeClr val="accent1"/>
-          </a:lnRef>
-          <a:fillRef idx="3">
-            <a:schemeClr val="accent1"/>
-          </a:fillRef>
-          <a:effectRef idx="2">
-            <a:schemeClr val="accent1"/>
-          </a:effectRef>
-          <a:fontRef idx="minor">
-            <a:schemeClr val="lt1"/>
-          </a:fontRef>
-        </p:style>
-        <p:txBody>
-          <a:bodyPr rtlCol="0" anchor="ctr" wrap="square" lIns="45720" rIns="45720" tIns="0" bIns="0"/>
-          <a:lstStyle/>
-          <a:p>
-            <a:pPr algn="ctr">
-              <a:lnSpc>
-                <a:spcPct val="95000"/>
-              </a:lnSpc>
-              <a:spcAft>
-                <a:spcPts val="0"/>
-              </a:spcAft>
-            </a:pPr>
-            <a:r>
-              <a:rPr sz="850" b="1">
-                <a:solidFill>
-                  <a:srgbClr val="0F5FDC"/>
-                </a:solidFill>
-                <a:latin typeface="Aptos"/>
-              </a:rPr>
-              <a:t>GTM Momentum</a:t>
-            </a:r>
-          </a:p>
-        </p:txBody>
-      </p:sp>
-      <p:sp>
-        <p:nvSpPr>
-          <p:cNvPr id="82" name="Freeform 81"/>
-          <p:cNvSpPr/>
-          <p:nvPr/>
-        </p:nvSpPr>
-        <p:spPr>
-          <a:xfrm>
-            <a:off x="8311896" y="3950208"/>
-            <a:ext cx="3044952" cy="0"/>
-          </a:xfrm>
-          <a:custGeom>
-            <a:avLst/>
-            <a:gdLst/>
-            <a:ahLst/>
-            <a:cxnLst/>
-            <a:rect l="l" t="t" r="r" b="b"/>
-            <a:pathLst>
-              <a:path w="3044952" h="0">
-                <a:moveTo>
-                  <a:pt x="0" y="0"/>
-                </a:moveTo>
-                <a:lnTo>
-                  <a:pt x="3044952" y="0"/>
-                </a:lnTo>
-              </a:path>
-            </a:pathLst>
-          </a:custGeom>
-          <a:noFill/>
-          <a:ln w="9525">
-            <a:solidFill>
-              <a:srgbClr val="E6EBF5"/>
-            </a:solidFill>
-          </a:ln>
-          <a:effectLst/>
-        </p:spPr>
-        <p:style>
-          <a:lnRef idx="1">
-            <a:schemeClr val="accent1"/>
-          </a:lnRef>
-          <a:fillRef idx="3">
-            <a:schemeClr val="accent1"/>
-          </a:fillRef>
-          <a:effectRef idx="2">
-            <a:schemeClr val="accent1"/>
-          </a:effectRef>
-          <a:fontRef idx="minor">
-            <a:schemeClr val="lt1"/>
-          </a:fontRef>
-        </p:style>
-        <p:txBody>
-          <a:bodyPr rtlCol="0" anchor="ctr"/>
-          <a:lstStyle/>
-          <a:p>
-            <a:pPr algn="ctr"/>
-          </a:p>
-        </p:txBody>
-      </p:sp>
-      <p:sp>
-        <p:nvSpPr>
-          <p:cNvPr id="83" name="TextBox 82"/>
+          <p:cNvPr id="97" name="TextBox 96"/>
           <p:cNvSpPr txBox="1"/>
           <p:nvPr/>
         </p:nvSpPr>
         <p:spPr>
           <a:xfrm>
-            <a:off x="8311896" y="4059935"/>
-            <a:ext cx="1828800" cy="201168"/>
+            <a:off x="9784080" y="5577840"/>
+            <a:ext cx="1664207" cy="347472"/>
           </a:xfrm>
           <a:prstGeom prst="rect">
             <a:avLst/>
@@ -6228,7 +6659,7 @@
           <a:noFill/>
         </p:spPr>
         <p:txBody>
-          <a:bodyPr wrap="square" lIns="0" rIns="0" tIns="0" bIns="0" anchor="t">
+          <a:bodyPr wrap="square" lIns="0" rIns="0" tIns="0" bIns="0" anchor="ctr">
             <a:spAutoFit/>
           </a:bodyPr>
           <a:lstStyle/>
@@ -6239,71 +6670,27 @@
               </a:spcAft>
             </a:pPr>
             <a:r>
-              <a:rPr sz="900" b="1">
+              <a:rPr sz="2100" b="1">
                 <a:solidFill>
-                  <a:srgbClr val="0F5FDC"/>
+                  <a:srgbClr val="5F1EBE"/>
                 </a:solidFill>
                 <a:latin typeface="Aptos"/>
               </a:rPr>
-              <a:t>HIGHLIGHTS</a:t>
+              <a:t>15+</a:t>
             </a:r>
           </a:p>
         </p:txBody>
       </p:sp>
       <p:sp>
         <p:nvSpPr>
-          <p:cNvPr id="84" name="Oval 83"/>
-          <p:cNvSpPr/>
-          <p:nvPr/>
-        </p:nvSpPr>
-        <p:spPr>
-          <a:xfrm>
-            <a:off x="8330183" y="4425696"/>
-            <a:ext cx="82296" cy="82296"/>
-          </a:xfrm>
-          <a:prstGeom prst="ellipse">
-            <a:avLst/>
-          </a:prstGeom>
-          <a:solidFill>
-            <a:srgbClr val="0F5FDC"/>
-          </a:solidFill>
-          <a:ln>
-            <a:noFill/>
-          </a:ln>
-          <a:effectLst/>
-        </p:spPr>
-        <p:style>
-          <a:lnRef idx="1">
-            <a:schemeClr val="accent1"/>
-          </a:lnRef>
-          <a:fillRef idx="3">
-            <a:schemeClr val="accent1"/>
-          </a:fillRef>
-          <a:effectRef idx="2">
-            <a:schemeClr val="accent1"/>
-          </a:effectRef>
-          <a:fontRef idx="minor">
-            <a:schemeClr val="lt1"/>
-          </a:fontRef>
-        </p:style>
-        <p:txBody>
-          <a:bodyPr rtlCol="0" anchor="ctr" wrap="square"/>
-          <a:lstStyle/>
-          <a:p>
-            <a:pPr algn="ctr"/>
-          </a:p>
-        </p:txBody>
-      </p:sp>
-      <p:sp>
-        <p:nvSpPr>
-          <p:cNvPr id="85" name="TextBox 84"/>
+          <p:cNvPr id="98" name="TextBox 97"/>
           <p:cNvSpPr txBox="1"/>
           <p:nvPr/>
         </p:nvSpPr>
         <p:spPr>
           <a:xfrm>
-            <a:off x="8531352" y="4334256"/>
-            <a:ext cx="2825496" cy="347472"/>
+            <a:off x="9784080" y="5943600"/>
+            <a:ext cx="1664207" cy="365760"/>
           </a:xfrm>
           <a:prstGeom prst="rect">
             <a:avLst/>
@@ -6318,21 +6705,12 @@
           <a:p>
             <a:pPr algn="l">
               <a:lnSpc>
-                <a:spcPct val="110000"/>
+                <a:spcPct val="105000"/>
               </a:lnSpc>
               <a:spcAft>
                 <a:spcPts val="0"/>
               </a:spcAft>
             </a:pPr>
-            <a:r>
-              <a:rPr sz="1100" b="1">
-                <a:solidFill>
-                  <a:srgbClr val="0F5FDC"/>
-                </a:solidFill>
-                <a:latin typeface="Aptos"/>
-              </a:rPr>
-              <a:t>96</a:t>
-            </a:r>
             <a:r>
               <a:rPr sz="950" b="0">
                 <a:solidFill>
@@ -6340,94 +6718,18 @@
                 </a:solidFill>
                 <a:latin typeface="Aptos"/>
               </a:rPr>
-              <a:t> media reactions — Autonomous Finance Platform with Google</a:t>
+              <a:t>Analyst briefings</a:t>
             </a:r>
           </a:p>
-        </p:txBody>
-      </p:sp>
-      <p:sp>
-        <p:nvSpPr>
-          <p:cNvPr id="86" name="Oval 85"/>
-          <p:cNvSpPr/>
-          <p:nvPr/>
-        </p:nvSpPr>
-        <p:spPr>
-          <a:xfrm>
-            <a:off x="8330183" y="4791456"/>
-            <a:ext cx="82296" cy="82296"/>
-          </a:xfrm>
-          <a:prstGeom prst="ellipse">
-            <a:avLst/>
-          </a:prstGeom>
-          <a:solidFill>
-            <a:srgbClr val="0F5FDC"/>
-          </a:solidFill>
-          <a:ln>
-            <a:noFill/>
-          </a:ln>
-          <a:effectLst/>
-        </p:spPr>
-        <p:style>
-          <a:lnRef idx="1">
-            <a:schemeClr val="accent1"/>
-          </a:lnRef>
-          <a:fillRef idx="3">
-            <a:schemeClr val="accent1"/>
-          </a:fillRef>
-          <a:effectRef idx="2">
-            <a:schemeClr val="accent1"/>
-          </a:effectRef>
-          <a:fontRef idx="minor">
-            <a:schemeClr val="lt1"/>
-          </a:fontRef>
-        </p:style>
-        <p:txBody>
-          <a:bodyPr rtlCol="0" anchor="ctr" wrap="square"/>
-          <a:lstStyle/>
-          <a:p>
-            <a:pPr algn="ctr"/>
-          </a:p>
-        </p:txBody>
-      </p:sp>
-      <p:sp>
-        <p:nvSpPr>
-          <p:cNvPr id="87" name="TextBox 86"/>
-          <p:cNvSpPr txBox="1"/>
-          <p:nvPr/>
-        </p:nvSpPr>
-        <p:spPr>
-          <a:xfrm>
-            <a:off x="8531352" y="4700016"/>
-            <a:ext cx="2825496" cy="347472"/>
-          </a:xfrm>
-          <a:prstGeom prst="rect">
-            <a:avLst/>
-          </a:prstGeom>
-          <a:noFill/>
-        </p:spPr>
-        <p:txBody>
-          <a:bodyPr wrap="square" lIns="0" rIns="0" tIns="0" bIns="0" anchor="t">
-            <a:spAutoFit/>
-          </a:bodyPr>
-          <a:lstStyle/>
           <a:p>
             <a:pPr algn="l">
               <a:lnSpc>
-                <a:spcPct val="110000"/>
+                <a:spcPct val="105000"/>
               </a:lnSpc>
               <a:spcAft>
                 <a:spcPts val="0"/>
               </a:spcAft>
             </a:pPr>
-            <a:r>
-              <a:rPr sz="1100" b="1">
-                <a:solidFill>
-                  <a:srgbClr val="0F5FDC"/>
-                </a:solidFill>
-                <a:latin typeface="Aptos"/>
-              </a:rPr>
-              <a:t>Krisp.ai</a:t>
-            </a:r>
             <a:r>
               <a:rPr sz="950" b="0">
                 <a:solidFill>
@@ -6435,257 +6737,7 @@
                 </a:solidFill>
                 <a:latin typeface="Aptos"/>
               </a:rPr>
-              <a:t> — real-time voice translation</a:t>
-            </a:r>
-          </a:p>
-        </p:txBody>
-      </p:sp>
-      <p:sp>
-        <p:nvSpPr>
-          <p:cNvPr id="88" name="Oval 87"/>
-          <p:cNvSpPr/>
-          <p:nvPr/>
-        </p:nvSpPr>
-        <p:spPr>
-          <a:xfrm>
-            <a:off x="8330183" y="5157216"/>
-            <a:ext cx="82296" cy="82296"/>
-          </a:xfrm>
-          <a:prstGeom prst="ellipse">
-            <a:avLst/>
-          </a:prstGeom>
-          <a:solidFill>
-            <a:srgbClr val="0F5FDC"/>
-          </a:solidFill>
-          <a:ln>
-            <a:noFill/>
-          </a:ln>
-          <a:effectLst/>
-        </p:spPr>
-        <p:style>
-          <a:lnRef idx="1">
-            <a:schemeClr val="accent1"/>
-          </a:lnRef>
-          <a:fillRef idx="3">
-            <a:schemeClr val="accent1"/>
-          </a:fillRef>
-          <a:effectRef idx="2">
-            <a:schemeClr val="accent1"/>
-          </a:effectRef>
-          <a:fontRef idx="minor">
-            <a:schemeClr val="lt1"/>
-          </a:fontRef>
-        </p:style>
-        <p:txBody>
-          <a:bodyPr rtlCol="0" anchor="ctr" wrap="square"/>
-          <a:lstStyle/>
-          <a:p>
-            <a:pPr algn="ctr"/>
-          </a:p>
-        </p:txBody>
-      </p:sp>
-      <p:sp>
-        <p:nvSpPr>
-          <p:cNvPr id="89" name="TextBox 88"/>
-          <p:cNvSpPr txBox="1"/>
-          <p:nvPr/>
-        </p:nvSpPr>
-        <p:spPr>
-          <a:xfrm>
-            <a:off x="8531352" y="5065776"/>
-            <a:ext cx="2825496" cy="347472"/>
-          </a:xfrm>
-          <a:prstGeom prst="rect">
-            <a:avLst/>
-          </a:prstGeom>
-          <a:noFill/>
-        </p:spPr>
-        <p:txBody>
-          <a:bodyPr wrap="square" lIns="0" rIns="0" tIns="0" bIns="0" anchor="t">
-            <a:spAutoFit/>
-          </a:bodyPr>
-          <a:lstStyle/>
-          <a:p>
-            <a:pPr algn="l">
-              <a:lnSpc>
-                <a:spcPct val="110000"/>
-              </a:lnSpc>
-              <a:spcAft>
-                <a:spcPts val="0"/>
-              </a:spcAft>
-            </a:pPr>
-            <a:r>
-              <a:rPr sz="1100" b="1">
-                <a:solidFill>
-                  <a:srgbClr val="0F5FDC"/>
-                </a:solidFill>
-                <a:latin typeface="Aptos"/>
-              </a:rPr>
-              <a:t>Stutt.ai</a:t>
-            </a:r>
-            <a:r>
-              <a:rPr sz="950" b="0">
-                <a:solidFill>
-                  <a:srgbClr val="000000"/>
-                </a:solidFill>
-                <a:latin typeface="Aptos"/>
-              </a:rPr>
-              <a:t> — automated collections</a:t>
-            </a:r>
-          </a:p>
-        </p:txBody>
-      </p:sp>
-      <p:sp>
-        <p:nvSpPr>
-          <p:cNvPr id="90" name="Freeform 89"/>
-          <p:cNvSpPr/>
-          <p:nvPr/>
-        </p:nvSpPr>
-        <p:spPr>
-          <a:xfrm>
-            <a:off x="1463040" y="6391656"/>
-            <a:ext cx="2788920" cy="0"/>
-          </a:xfrm>
-          <a:custGeom>
-            <a:avLst/>
-            <a:gdLst/>
-            <a:ahLst/>
-            <a:cxnLst/>
-            <a:rect l="l" t="t" r="r" b="b"/>
-            <a:pathLst>
-              <a:path w="2788920" h="0">
-                <a:moveTo>
-                  <a:pt x="0" y="0"/>
-                </a:moveTo>
-                <a:lnTo>
-                  <a:pt x="2788920" y="0"/>
-                </a:lnTo>
-              </a:path>
-            </a:pathLst>
-          </a:custGeom>
-          <a:noFill/>
-          <a:ln w="9525">
-            <a:solidFill>
-              <a:srgbClr val="C8D2DD"/>
-            </a:solidFill>
-          </a:ln>
-          <a:effectLst/>
-        </p:spPr>
-        <p:style>
-          <a:lnRef idx="1">
-            <a:schemeClr val="accent1"/>
-          </a:lnRef>
-          <a:fillRef idx="3">
-            <a:schemeClr val="accent1"/>
-          </a:fillRef>
-          <a:effectRef idx="2">
-            <a:schemeClr val="accent1"/>
-          </a:effectRef>
-          <a:fontRef idx="minor">
-            <a:schemeClr val="lt1"/>
-          </a:fontRef>
-        </p:style>
-        <p:txBody>
-          <a:bodyPr rtlCol="0" anchor="ctr"/>
-          <a:lstStyle/>
-          <a:p>
-            <a:pPr algn="ctr"/>
-          </a:p>
-        </p:txBody>
-      </p:sp>
-      <p:sp>
-        <p:nvSpPr>
-          <p:cNvPr id="91" name="Freeform 90"/>
-          <p:cNvSpPr/>
-          <p:nvPr/>
-        </p:nvSpPr>
-        <p:spPr>
-          <a:xfrm>
-            <a:off x="7955279" y="6391656"/>
-            <a:ext cx="2788921" cy="0"/>
-          </a:xfrm>
-          <a:custGeom>
-            <a:avLst/>
-            <a:gdLst/>
-            <a:ahLst/>
-            <a:cxnLst/>
-            <a:rect l="l" t="t" r="r" b="b"/>
-            <a:pathLst>
-              <a:path w="2788921" h="0">
-                <a:moveTo>
-                  <a:pt x="0" y="0"/>
-                </a:moveTo>
-                <a:lnTo>
-                  <a:pt x="2788921" y="0"/>
-                </a:lnTo>
-              </a:path>
-            </a:pathLst>
-          </a:custGeom>
-          <a:noFill/>
-          <a:ln w="9525">
-            <a:solidFill>
-              <a:srgbClr val="C8D2DD"/>
-            </a:solidFill>
-          </a:ln>
-          <a:effectLst/>
-        </p:spPr>
-        <p:style>
-          <a:lnRef idx="1">
-            <a:schemeClr val="accent1"/>
-          </a:lnRef>
-          <a:fillRef idx="3">
-            <a:schemeClr val="accent1"/>
-          </a:fillRef>
-          <a:effectRef idx="2">
-            <a:schemeClr val="accent1"/>
-          </a:effectRef>
-          <a:fontRef idx="minor">
-            <a:schemeClr val="lt1"/>
-          </a:fontRef>
-        </p:style>
-        <p:txBody>
-          <a:bodyPr rtlCol="0" anchor="ctr"/>
-          <a:lstStyle/>
-          <a:p>
-            <a:pPr algn="ctr"/>
-          </a:p>
-        </p:txBody>
-      </p:sp>
-      <p:sp>
-        <p:nvSpPr>
-          <p:cNvPr id="92" name="TextBox 91"/>
-          <p:cNvSpPr txBox="1"/>
-          <p:nvPr/>
-        </p:nvSpPr>
-        <p:spPr>
-          <a:xfrm>
-            <a:off x="594360" y="6272784"/>
-            <a:ext cx="11000232" cy="237744"/>
-          </a:xfrm>
-          <a:prstGeom prst="rect">
-            <a:avLst/>
-          </a:prstGeom>
-          <a:noFill/>
-        </p:spPr>
-        <p:txBody>
-          <a:bodyPr wrap="square" lIns="0" rIns="0" tIns="0" bIns="0" anchor="ctr">
-            <a:spAutoFit/>
-          </a:bodyPr>
-          <a:lstStyle/>
-          <a:p>
-            <a:pPr algn="ctr">
-              <a:spcAft>
-                <a:spcPts val="0"/>
-              </a:spcAft>
-            </a:pPr>
-            <a:r>
-              <a:rPr sz="1250" b="1">
-                <a:solidFill>
-                  <a:srgbClr val="411482"/>
-                </a:solidFill>
-                <a:latin typeface="Aptos"/>
-              </a:rPr>
-              <a:t>Aligned. Integrated. Innovative. Impactful.</a:t>
+              <a:t>planned, FY27</a:t>
             </a:r>
           </a:p>
         </p:txBody>
